--- a/docs/presentation.pptx
+++ b/docs/presentation.pptx
@@ -21,7 +21,6 @@
     <p:sldId id="269" r:id="rId15"/>
     <p:sldId id="270" r:id="rId16"/>
     <p:sldId id="271" r:id="rId17"/>
-    <p:sldId id="272" r:id="rId18"/>
     <p:sldId id="275" r:id="rId26"/>
     <p:sldId id="273" r:id="rId19"/>
     <p:sldId id="274" r:id="rId20"/>
@@ -1161,94 +1160,6 @@
             <a:fld id="{F7021451-1387-4CA6-816F-3879F97B5CBC}" type="slidenum">
               <a:rPr lang="en-US"/>
               <a:t>16</a:t>
-            </a:fld>
-            <a:endParaRPr lang="en-US"/>
-          </a:p>
-        </p:txBody>
-      </p:sp>
-    </p:spTree>
-    <p:extLst>
-      <p:ext uri="{BB962C8B-B14F-4D97-AF65-F5344CB8AC3E}">
-        <p14:creationId xmlns:p14="http://schemas.microsoft.com/office/powerpoint/2010/main" val="1024086991"/>
-      </p:ext>
-    </p:extLst>
-  </p:cSld>
-  <p:clrMapOvr>
-    <a:masterClrMapping/>
-  </p:clrMapOvr>
-</p:notes>
-</file>
-
-<file path=ppt/notesSlides/notesSlide17.xml><?xml version="1.0" encoding="utf-8"?>
-<p:notes xmlns:a="http://schemas.openxmlformats.org/drawingml/2006/main" xmlns:r="http://schemas.openxmlformats.org/officeDocument/2006/relationships" xmlns:p="http://schemas.openxmlformats.org/presentationml/2006/main">
-  <p:cSld>
-    <p:spTree>
-      <p:nvGrpSpPr>
-        <p:cNvPr id="1" name=""/>
-        <p:cNvGrpSpPr/>
-        <p:nvPr/>
-      </p:nvGrpSpPr>
-      <p:grpSpPr>
-        <a:xfrm>
-          <a:off x="0" y="0"/>
-          <a:ext cx="0" cy="0"/>
-          <a:chOff x="0" y="0"/>
-          <a:chExt cx="0" cy="0"/>
-        </a:xfrm>
-      </p:grpSpPr>
-      <p:sp>
-        <p:nvSpPr>
-          <p:cNvPr id="2" name="Slide Image Placeholder 1"/>
-          <p:cNvSpPr>
-            <a:spLocks noGrp="1" noRot="1" noChangeAspect="1"/>
-          </p:cNvSpPr>
-          <p:nvPr>
-            <p:ph type="sldImg"/>
-          </p:nvPr>
-        </p:nvSpPr>
-        <p:spPr/>
-      </p:sp>
-      <p:sp>
-        <p:nvSpPr>
-          <p:cNvPr id="3" name="Notes Placeholder 2"/>
-          <p:cNvSpPr>
-            <a:spLocks noGrp="1"/>
-          </p:cNvSpPr>
-          <p:nvPr>
-            <p:ph type="body" idx="1"/>
-          </p:nvPr>
-        </p:nvSpPr>
-        <p:spPr/>
-        <p:txBody>
-          <a:bodyPr/>
-          <a:lstStyle/>
-          <a:p>
-            <a:r>
-              <a:rPr lang="en-US" dirty="0"/>
-              <a:t>클라이맥스. 재현 5회·루틴 9단계로 갱신.</a:t>
-            </a:r>
-            <a:endParaRPr lang="en-US" dirty="0"/>
-          </a:p>
-        </p:txBody>
-      </p:sp>
-      <p:sp>
-        <p:nvSpPr>
-          <p:cNvPr id="4" name="Slide Number Placeholder 3"/>
-          <p:cNvSpPr>
-            <a:spLocks noGrp="1"/>
-          </p:cNvSpPr>
-          <p:nvPr>
-            <p:ph type="sldNum" sz="quarter" idx="10"/>
-          </p:nvPr>
-        </p:nvSpPr>
-        <p:spPr/>
-        <p:txBody>
-          <a:bodyPr/>
-          <a:lstStyle/>
-          <a:p>
-            <a:fld id="{F7021451-1387-4CA6-816F-3879F97B5CBC}" type="slidenum">
-              <a:rPr lang="en-US"/>
-              <a:t>17</a:t>
             </a:fld>
             <a:endParaRPr lang="en-US"/>
           </a:p>
@@ -2497,6 +2408,10 @@
           </a:solidFill>
           <a:ln/>
         </p:spPr>
+        <p:txBody>
+          <a:bodyPr/>
+          <a:p/>
+        </p:txBody>
       </p:sp>
       <p:sp>
         <p:nvSpPr>
@@ -2517,6 +2432,10 @@
           </a:solidFill>
           <a:ln/>
         </p:spPr>
+        <p:txBody>
+          <a:bodyPr/>
+          <a:p/>
+        </p:txBody>
       </p:sp>
       <p:sp>
         <p:nvSpPr>
@@ -2539,6 +2458,10 @@
           </a:solidFill>
           <a:ln/>
         </p:spPr>
+        <p:txBody>
+          <a:bodyPr/>
+          <a:p/>
+        </p:txBody>
       </p:sp>
       <p:sp>
         <p:nvSpPr>
@@ -2729,7 +2652,7 @@
                 <a:ea typeface="Calibri" pitchFamily="34" charset="-122"/>
                 <a:cs typeface="Calibri" pitchFamily="34" charset="-120"/>
               </a:rPr>
-              <a:t>운영에서 구축으로 — IaC · GitOps · 관측성 기반 하나의 사이클</a:t>
+              <a:t>운영에서 구축으로: IaC, GitOps, 관측성을 한 사이클로 직접 돌려봤습니다</a:t>
             </a:r>
             <a:endParaRPr lang="en-US" sz="1700" dirty="0"/>
           </a:p>
@@ -2841,7 +2764,7 @@
                 <a:ea typeface="Calibri" pitchFamily="34" charset="-122"/>
                 <a:cs typeface="Calibri" pitchFamily="34" charset="-120"/>
               </a:rPr>
-              <a:t>2026.08 (전 구간 재검증 ×5)</a:t>
+              <a:t>2026.08 (재검증 5회)</a:t>
             </a:r>
             <a:endParaRPr lang="en-US" sz="1300" dirty="0"/>
           </a:p>
@@ -2912,7 +2835,7 @@
                 <a:ea typeface="Cambria" pitchFamily="34" charset="-122"/>
                 <a:cs typeface="Cambria" pitchFamily="34" charset="-120"/>
               </a:rPr>
-              <a:t>06. 시연 과정 (2/3) — 관측·알람 검증</a:t>
+              <a:t>06. 시연 과정 (2/3) - 관측·알람 검증</a:t>
             </a:r>
             <a:endParaRPr lang="en-US" sz="2800" dirty="0"/>
           </a:p>
@@ -2951,7 +2874,7 @@
                 <a:ea typeface="Calibri" pitchFamily="34" charset="-122"/>
                 <a:cs typeface="Calibri" pitchFamily="34" charset="-120"/>
               </a:rPr>
-              <a:t>PAGE 08</a:t>
+              <a:t>PAGE 10</a:t>
             </a:r>
             <a:endParaRPr lang="en-US" sz="1000" dirty="0"/>
           </a:p>
@@ -2983,6 +2906,10 @@
             <a:prstDash val="solid"/>
           </a:ln>
         </p:spPr>
+        <p:txBody>
+          <a:bodyPr/>
+          <a:p/>
+        </p:txBody>
       </p:sp>
       <p:sp>
         <p:nvSpPr>
@@ -3042,6 +2969,10 @@
           </a:solidFill>
           <a:ln/>
         </p:spPr>
+        <p:txBody>
+          <a:bodyPr/>
+          <a:p/>
+        </p:txBody>
       </p:sp>
       <p:sp>
         <p:nvSpPr>
@@ -3069,6 +3000,10 @@
             <a:prstDash val="solid"/>
           </a:ln>
         </p:spPr>
+        <p:txBody>
+          <a:bodyPr/>
+          <a:p/>
+        </p:txBody>
       </p:sp>
       <p:sp>
         <p:nvSpPr>
@@ -3128,6 +3063,10 @@
           </a:solidFill>
           <a:ln/>
         </p:spPr>
+        <p:txBody>
+          <a:bodyPr/>
+          <a:p/>
+        </p:txBody>
       </p:sp>
       <p:sp>
         <p:nvSpPr>
@@ -3155,6 +3094,10 @@
             <a:prstDash val="solid"/>
           </a:ln>
         </p:spPr>
+        <p:txBody>
+          <a:bodyPr/>
+          <a:p/>
+        </p:txBody>
       </p:sp>
       <p:sp>
         <p:nvSpPr>
@@ -3228,7 +3171,7 @@
                 <a:ea typeface="Calibri" pitchFamily="34" charset="-122"/>
                 <a:cs typeface="Calibri" pitchFamily="34" charset="-120"/>
               </a:rPr>
-              <a:t>RDS 지표는 CloudWatch → exporter로 Prometheus에 유입 (알람 경로 단일화)</a:t>
+              <a:t>RDS 지표는 CloudWatch에서 exporter를 거쳐 Prometheus로 모음. 알람 경로를 하나로</a:t>
             </a:r>
             <a:endParaRPr lang="en-US" sz="1250" dirty="0"/>
           </a:p>
@@ -3267,7 +3210,7 @@
                 <a:ea typeface="Calibri" pitchFamily="34" charset="-122"/>
                 <a:cs typeface="Calibri" pitchFamily="34" charset="-120"/>
               </a:rPr>
-              <a:t>장애 주입 검증 — 실제로 장애를 만들었다</a:t>
+              <a:t>장애를 직접 만들어서 확인</a:t>
             </a:r>
             <a:endParaRPr lang="en-US" sz="1450" dirty="0"/>
           </a:p>
@@ -3331,7 +3274,7 @@
                 <a:ea typeface="Calibri" pitchFamily="34" charset="-122"/>
                 <a:cs typeface="Calibri" pitchFamily="34" charset="-120"/>
               </a:rPr>
-              <a:t>복구 시 RESOLVED 통보까지 — 왕복 검증</a:t>
+              <a:t>복구되면 RESOLVED 통보까지 오는지 왕복 확인</a:t>
             </a:r>
             <a:endParaRPr lang="en-US" sz="1350" dirty="0"/>
           </a:p>
@@ -3352,7 +3295,7 @@
                 <a:ea typeface="Calibri" pitchFamily="34" charset="-122"/>
                 <a:cs typeface="Calibri" pitchFamily="34" charset="-120"/>
               </a:rPr>
-              <a:t>파드 삭제 시 자동 복구(self-healing)도 같은 실험에서 실증</a:t>
+              <a:t>파드 삭제 후 자동 복구(self-healing)도 같은 실험에서 확인</a:t>
             </a:r>
             <a:endParaRPr lang="en-US" sz="1350" dirty="0"/>
           </a:p>
@@ -3370,7 +3313,7 @@
                 <a:ea typeface="Calibri" pitchFamily="34" charset="-122"/>
                 <a:cs typeface="Calibri" pitchFamily="34" charset="-120"/>
               </a:rPr>
-              <a:t>실전 사례 — Grafana OOMKilled도 이 알람 경로에 실제 이벤트로 포착</a:t>
+              <a:t>이후 Grafana OOMKilled도 이 경로로 실제 이벤트가 잡힘</a:t>
             </a:r>
             <a:endParaRPr lang="en-US" sz="1350" dirty="0"/>
           </a:p>
@@ -3409,7 +3352,7 @@
                 <a:ea typeface="Cambria" pitchFamily="34" charset="-122"/>
                 <a:cs typeface="Cambria" pitchFamily="34" charset="-120"/>
               </a:rPr>
-              <a:t>“알림이 오는 것을 확인한 알람만 믿을 수 있다”</a:t>
+              <a:t>울리는 것을 확인한 알람만 믿기로 했습니다</a:t>
             </a:r>
             <a:endParaRPr lang="en-US" sz="1800" dirty="0"/>
           </a:p>
@@ -3448,7 +3391,7 @@
                 <a:ea typeface="Calibri" pitchFamily="34" charset="-122"/>
                 <a:cs typeface="Calibri" pitchFamily="34" charset="-120"/>
               </a:rPr>
-              <a:t>Slack — FIRING → RESOLVED 실수신</a:t>
+              <a:t>Slack: FIRING → RESOLVED 수신</a:t>
             </a:r>
             <a:endParaRPr lang="en-US" sz="1150" dirty="0"/>
           </a:p>
@@ -3543,7 +3486,7 @@
                 <a:ea typeface="Cambria" pitchFamily="34" charset="-122"/>
                 <a:cs typeface="Cambria" pitchFamily="34" charset="-120"/>
               </a:rPr>
-              <a:t>06. 시연 과정 (3/3) — HPA 오토스케일링</a:t>
+              <a:t>06. 시연 과정 (3/3) - HPA 오토스케일링</a:t>
             </a:r>
             <a:endParaRPr lang="en-US" sz="2800" dirty="0"/>
           </a:p>
@@ -3582,7 +3525,7 @@
                 <a:ea typeface="Calibri" pitchFamily="34" charset="-122"/>
                 <a:cs typeface="Calibri" pitchFamily="34" charset="-120"/>
               </a:rPr>
-              <a:t>PAGE 09</a:t>
+              <a:t>PAGE 11</a:t>
             </a:r>
             <a:endParaRPr lang="en-US" sz="1000" dirty="0"/>
           </a:p>
@@ -3621,7 +3564,7 @@
                 <a:ea typeface="Calibri" pitchFamily="34" charset="-122"/>
                 <a:cs typeface="Calibri" pitchFamily="34" charset="-120"/>
               </a:rPr>
-              <a:t>kubectl get hpa · get pods — CPU 50% 기준 2~6 구성, 파드가 서로 다른 노드(AZ)에 분산 배치</a:t>
+              <a:t>kubectl get hpa / get pods: CPU 50% 기준 2~6, 파드는 서로 다른 노드(AZ)에 분산</a:t>
             </a:r>
             <a:endParaRPr lang="en-US" sz="1150" dirty="0"/>
           </a:p>
@@ -3684,7 +3627,7 @@
                 <a:ea typeface="Calibri" pitchFamily="34" charset="-122"/>
                 <a:cs typeface="Calibri" pitchFamily="34" charset="-120"/>
               </a:rPr>
-              <a:t>Grafana CPU Usage — 부하 투입 시 스파이크, summarizer 파드 6개로 증설 (우측 범례)</a:t>
+              <a:t>Grafana CPU Usage: 부하를 넣자 스파이크, summarizer 파드가 6개로 늘어남 (우측 범례)</a:t>
             </a:r>
             <a:endParaRPr lang="en-US" sz="1150" dirty="0"/>
           </a:p>
@@ -3735,6 +3678,10 @@
           </a:solidFill>
           <a:ln/>
         </p:spPr>
+        <p:txBody>
+          <a:bodyPr/>
+          <a:p/>
+        </p:txBody>
       </p:sp>
       <p:sp>
         <p:nvSpPr>
@@ -3769,7 +3716,7 @@
                 <a:ea typeface="Calibri" pitchFamily="34" charset="-122"/>
                 <a:cs typeface="Calibri" pitchFamily="34" charset="-120"/>
               </a:rPr>
-              <a:t>① 부하 투입 — busybox ×3</a:t>
+              <a:t>① 부하 투입 (busybox 3개)</a:t>
             </a:r>
             <a:endParaRPr lang="en-US" sz="1150" dirty="0"/>
           </a:p>
@@ -3794,6 +3741,10 @@
           </a:solidFill>
           <a:ln/>
         </p:spPr>
+        <p:txBody>
+          <a:bodyPr/>
+          <a:p/>
+        </p:txBody>
       </p:sp>
       <p:sp>
         <p:nvSpPr>
@@ -3816,6 +3767,10 @@
           </a:solidFill>
           <a:ln/>
         </p:spPr>
+        <p:txBody>
+          <a:bodyPr/>
+          <a:p/>
+        </p:txBody>
       </p:sp>
       <p:sp>
         <p:nvSpPr>
@@ -3875,6 +3830,10 @@
           </a:solidFill>
           <a:ln/>
         </p:spPr>
+        <p:txBody>
+          <a:bodyPr/>
+          <a:p/>
+        </p:txBody>
       </p:sp>
       <p:sp>
         <p:nvSpPr>
@@ -3897,6 +3856,10 @@
           </a:solidFill>
           <a:ln/>
         </p:spPr>
+        <p:txBody>
+          <a:bodyPr/>
+          <a:p/>
+        </p:txBody>
       </p:sp>
       <p:sp>
         <p:nvSpPr>
@@ -3956,6 +3919,10 @@
           </a:solidFill>
           <a:ln/>
         </p:spPr>
+        <p:txBody>
+          <a:bodyPr/>
+          <a:p/>
+        </p:txBody>
       </p:sp>
       <p:sp>
         <p:nvSpPr>
@@ -3978,6 +3945,10 @@
           </a:solidFill>
           <a:ln/>
         </p:spPr>
+        <p:txBody>
+          <a:bodyPr/>
+          <a:p/>
+        </p:txBody>
       </p:sp>
       <p:sp>
         <p:nvSpPr>
@@ -4051,7 +4022,7 @@
                 <a:ea typeface="Calibri" pitchFamily="34" charset="-122"/>
                 <a:cs typeface="Calibri" pitchFamily="34" charset="-120"/>
               </a:rPr>
-              <a:t>관찰 — 6번째 파드는 Pending(“Too many pods”): 노드 확장은 Cluster Autoscaler의 몫 · HPA의 한계까지 실증 (백로그 근거)</a:t>
+              <a:t>관찰: 6번째 파드는 Pending(Too many pods). 노드를 늘리는 건 Cluster Autoscaler 몫이라 HPA의 한계도 같이 봄 (백로그 근거)</a:t>
             </a:r>
             <a:endParaRPr lang="en-US" sz="1150" dirty="0"/>
           </a:p>
@@ -4122,7 +4093,7 @@
                 <a:ea typeface="Cambria" pitchFamily="34" charset="-122"/>
                 <a:cs typeface="Cambria" pitchFamily="34" charset="-120"/>
               </a:rPr>
-              <a:t>07. 트러블슈팅 (1/3) — 노드그룹 무증상 실패</a:t>
+              <a:t>07. 트러블슈팅 (1/3) - 노드그룹 무증상 실패</a:t>
             </a:r>
             <a:endParaRPr lang="en-US" sz="2800" dirty="0"/>
           </a:p>
@@ -4161,7 +4132,7 @@
                 <a:ea typeface="Calibri" pitchFamily="34" charset="-122"/>
                 <a:cs typeface="Calibri" pitchFamily="34" charset="-120"/>
               </a:rPr>
-              <a:t>PAGE 10</a:t>
+              <a:t>PAGE 12</a:t>
             </a:r>
             <a:endParaRPr lang="en-US" sz="1000" dirty="0"/>
           </a:p>
@@ -4188,6 +4159,10 @@
           </a:solidFill>
           <a:ln/>
         </p:spPr>
+        <p:txBody>
+          <a:bodyPr/>
+          <a:p/>
+        </p:txBody>
       </p:sp>
       <p:sp>
         <p:nvSpPr>
@@ -4261,7 +4236,7 @@
                 <a:ea typeface="Calibri" pitchFamily="34" charset="-122"/>
                 <a:cs typeface="Calibri" pitchFamily="34" charset="-120"/>
               </a:rPr>
-              <a:t>EKS 노드그룹 38분간 CREATE_FAILED — 상태 API(health.issues)는 끝까지 비어 있음</a:t>
+              <a:t>EKS 노드그룹이 38분 만에 CREATE_FAILED. 그동안 상태 API(health.issues)는 비어 있었음</a:t>
             </a:r>
             <a:endParaRPr lang="en-US" sz="1350" dirty="0"/>
           </a:p>
@@ -4288,6 +4263,10 @@
           </a:solidFill>
           <a:ln/>
         </p:spPr>
+        <p:txBody>
+          <a:bodyPr/>
+          <a:p/>
+        </p:txBody>
       </p:sp>
       <p:sp>
         <p:nvSpPr>
@@ -4361,7 +4340,7 @@
                 <a:ea typeface="Calibri" pitchFamily="34" charset="-122"/>
                 <a:cs typeface="Calibri" pitchFamily="34" charset="-120"/>
               </a:rPr>
-              <a:t>“인스턴스가 떴는가?”로 문제를 절반으로 쪼갬 → 기동 자체가 거부됨. 원인이 실제로 적히는 곳은 ASG 활동 로그</a:t>
+              <a:t>인스턴스가 떴는지부터 확인해 범위를 절반으로 줄임. 기동 자체가 거부된 것이었고, 사유는 ASG 활동 로그에만 적혀 있었음</a:t>
             </a:r>
             <a:endParaRPr lang="en-US" sz="1350" dirty="0"/>
           </a:p>
@@ -4388,6 +4367,10 @@
           </a:solidFill>
           <a:ln/>
         </p:spPr>
+        <p:txBody>
+          <a:bodyPr/>
+          <a:p/>
+        </p:txBody>
       </p:sp>
       <p:sp>
         <p:nvSpPr>
@@ -4461,7 +4444,7 @@
                 <a:ea typeface="Calibri" pitchFamily="34" charset="-122"/>
                 <a:cs typeface="Calibri" pitchFamily="34" charset="-120"/>
               </a:rPr>
-              <a:t>AWS Free Plan 계정의 인스턴스 타입 제약 — 코드 문제가 아니라 계정 정책</a:t>
+              <a:t>AWS Free Plan 계정의 인스턴스 타입 제약. 코드가 아니라 계정 정책 문제</a:t>
             </a:r>
             <a:endParaRPr lang="en-US" sz="1350" dirty="0"/>
           </a:p>
@@ -4488,6 +4471,10 @@
           </a:solidFill>
           <a:ln/>
         </p:spPr>
+        <p:txBody>
+          <a:bodyPr/>
+          <a:p/>
+        </p:txBody>
       </p:sp>
       <p:sp>
         <p:nvSpPr>
@@ -4536,7 +4523,7 @@
                 <a:ea typeface="Calibri" pitchFamily="34" charset="-122"/>
                 <a:cs typeface="Calibri" pitchFamily="34" charset="-120"/>
               </a:rPr>
-              <a:t>우회(타입 변경) 대신 근본 해결(Paid 전환) — 코드 한 줄 안 바꾸고 재시도 성공</a:t>
+              <a:t>타입을 바꿔 우회하는 대신 Paid Plan으로 전환. 코드는 그대로 두고 재시도해 성공</a:t>
             </a:r>
             <a:endParaRPr lang="en-US" sz="1400" dirty="0"/>
           </a:p>
@@ -4589,7 +4576,7 @@
                 <a:ea typeface="Cambria" pitchFamily="34" charset="-122"/>
                 <a:cs typeface="Cambria" pitchFamily="34" charset="-120"/>
               </a:rPr>
-              <a:t>실패는 “원인이 기록되는 곳”이 따로 있다 — API가 조용하다고 정상이 아니다</a:t>
+              <a:t>실패 사유가 적히는 곳은 따로 있다. API가 조용하다고 정상인 게 아니다</a:t>
             </a:r>
             <a:endParaRPr lang="en-US" sz="1600" dirty="0"/>
           </a:p>
@@ -4628,7 +4615,7 @@
                 <a:ea typeface="Calibri" pitchFamily="34" charset="-122"/>
                 <a:cs typeface="Calibri" pitchFamily="34" charset="-120"/>
               </a:rPr>
-              <a:t>총 7건을 S/A/B 등급으로 분류해 문서화 — 발표는 등급 상위 3건(S·S·A), 나머지 4건은 GitHub repo 참조</a:t>
+              <a:t>트러블슈팅은 총 7건을 S/A/B 등급으로 기록. 여기서는 상위 3건(S·S·A)만 다루고 나머지는 repo에</a:t>
             </a:r>
             <a:endParaRPr lang="en-US" sz="1200" dirty="0"/>
           </a:p>
@@ -4699,7 +4686,7 @@
                 <a:ea typeface="Cambria" pitchFamily="34" charset="-122"/>
                 <a:cs typeface="Cambria" pitchFamily="34" charset="-120"/>
               </a:rPr>
-              <a:t>07. 트러블슈팅 (2/3) — OIDC 인증 불일치</a:t>
+              <a:t>07. 트러블슈팅 (2/3) - OIDC 인증 불일치</a:t>
             </a:r>
             <a:endParaRPr lang="en-US" sz="2800" dirty="0"/>
           </a:p>
@@ -4738,7 +4725,7 @@
                 <a:ea typeface="Calibri" pitchFamily="34" charset="-122"/>
                 <a:cs typeface="Calibri" pitchFamily="34" charset="-120"/>
               </a:rPr>
-              <a:t>PAGE 11</a:t>
+              <a:t>PAGE 13</a:t>
             </a:r>
             <a:endParaRPr lang="en-US" sz="1000" dirty="0"/>
           </a:p>
@@ -4765,6 +4752,10 @@
           </a:solidFill>
           <a:ln/>
         </p:spPr>
+        <p:txBody>
+          <a:bodyPr/>
+          <a:p/>
+        </p:txBody>
       </p:sp>
       <p:sp>
         <p:nvSpPr>
@@ -4838,7 +4829,7 @@
                 <a:ea typeface="Calibri" pitchFamily="34" charset="-122"/>
                 <a:cs typeface="Calibri" pitchFamily="34" charset="-120"/>
               </a:rPr>
-              <a:t>CI의 AWS 인증(OIDC) 실패 — 에러는 “Not authorized” 한 줄뿐</a:t>
+              <a:t>CI의 AWS 인증(OIDC) 실패. 에러는 Not authorized 한 줄뿐</a:t>
             </a:r>
             <a:endParaRPr lang="en-US" sz="1350" dirty="0"/>
           </a:p>
@@ -4865,6 +4856,10 @@
           </a:solidFill>
           <a:ln/>
         </p:spPr>
+        <p:txBody>
+          <a:bodyPr/>
+          <a:p/>
+        </p:txBody>
       </p:sp>
       <p:sp>
         <p:nvSpPr>
@@ -4938,7 +4933,7 @@
                 <a:ea typeface="Calibri" pitchFamily="34" charset="-122"/>
                 <a:cs typeface="Calibri" pitchFamily="34" charset="-120"/>
               </a:rPr>
-              <a:t>가설 2개(전파 지연 · 정책 연산자)를 세우고 검증으로 기각. CloudTrail에는 GitHub가 실제 제시한 값이 남아 있었다</a:t>
+              <a:t>전파 지연, 정책 연산자 두 가설을 세워 확인했지만 둘 다 아니었음. CloudTrail에 GitHub가 실제로 보낸 값이 남아 있었음</a:t>
             </a:r>
             <a:endParaRPr lang="en-US" sz="1350" dirty="0"/>
           </a:p>
@@ -4965,6 +4960,10 @@
           </a:solidFill>
           <a:ln/>
         </p:spPr>
+        <p:txBody>
+          <a:bodyPr/>
+          <a:p/>
+        </p:txBody>
       </p:sp>
       <p:sp>
         <p:nvSpPr>
@@ -5038,7 +5037,7 @@
                 <a:ea typeface="Calibri" pitchFamily="34" charset="-122"/>
                 <a:cs typeface="Calibri" pitchFamily="34" charset="-120"/>
               </a:rPr>
-              <a:t>GitHub가 sub 클레임 형식을 변경(@계정ID·@저장소ID 추가) — 커뮤니티 모듈은 구형식 조건 생성</a:t>
+              <a:t>GitHub가 sub 클레임에 @계정ID·@저장소ID를 붙이는 새 형식을 쓰는데, 커뮤니티 모듈은 옛 형식으로 조건을 만들고 있었음</a:t>
             </a:r>
             <a:endParaRPr lang="en-US" sz="1350" dirty="0"/>
           </a:p>
@@ -5065,6 +5064,10 @@
           </a:solidFill>
           <a:ln/>
         </p:spPr>
+        <p:txBody>
+          <a:bodyPr/>
+          <a:p/>
+        </p:txBody>
       </p:sp>
       <p:sp>
         <p:nvSpPr>
@@ -5113,7 +5116,7 @@
                 <a:ea typeface="Calibri" pitchFamily="34" charset="-122"/>
                 <a:cs typeface="Calibri" pitchFamily="34" charset="-120"/>
               </a:rPr>
-              <a:t>Role을 직접 정의하고 ID까지 고정 — 계정명 탈취·재생성 공격까지 막히는 부수효과</a:t>
+              <a:t>Role을 직접 정의하고 ID까지 고정. 계정명 탈취·재생성 공격까지 막히는 부수효과</a:t>
             </a:r>
             <a:endParaRPr lang="en-US" sz="1400" dirty="0"/>
           </a:p>
@@ -5166,7 +5169,7 @@
                 <a:ea typeface="Cambria" pitchFamily="34" charset="-122"/>
                 <a:cs typeface="Cambria" pitchFamily="34" charset="-120"/>
               </a:rPr>
-              <a:t>신뢰 정책은 “내가 기대하는 값”이 아니라 “상대가 보내는 값”과 일치해야 한다</a:t>
+              <a:t>신뢰 정책은 내가 기대하는 값이 아니라 상대가 실제로 보내는 값에 맞춰야 한다</a:t>
             </a:r>
             <a:endParaRPr lang="en-US" sz="1600" dirty="0"/>
           </a:p>
@@ -5237,7 +5240,7 @@
                 <a:ea typeface="Cambria" pitchFamily="34" charset="-122"/>
                 <a:cs typeface="Cambria" pitchFamily="34" charset="-120"/>
               </a:rPr>
-              <a:t>07. 트러블슈팅 (3/3) — 파드 전면 기동 불가</a:t>
+              <a:t>07. 트러블슈팅 (3/3) - 파드 전면 기동 불가</a:t>
             </a:r>
             <a:endParaRPr lang="en-US" sz="2800" dirty="0"/>
           </a:p>
@@ -5276,7 +5279,7 @@
                 <a:ea typeface="Calibri" pitchFamily="34" charset="-122"/>
                 <a:cs typeface="Calibri" pitchFamily="34" charset="-120"/>
               </a:rPr>
-              <a:t>PAGE 12</a:t>
+              <a:t>PAGE 14</a:t>
             </a:r>
             <a:endParaRPr lang="en-US" sz="1000" dirty="0"/>
           </a:p>
@@ -5303,6 +5306,10 @@
           </a:solidFill>
           <a:ln/>
         </p:spPr>
+        <p:txBody>
+          <a:bodyPr/>
+          <a:p/>
+        </p:txBody>
       </p:sp>
       <p:sp>
         <p:nvSpPr>
@@ -5376,7 +5383,7 @@
                 <a:ea typeface="Calibri" pitchFamily="34" charset="-122"/>
                 <a:cs typeface="Calibri" pitchFamily="34" charset="-120"/>
               </a:rPr>
-              <a:t>첫 배포에서 파드 전원이 CreateContainerConfigError — 이미지 풀·Secret은 정상인데 컨테이너 생성이 거부됨</a:t>
+              <a:t>첫 배포에서 파드 전부가 CreateContainerConfigError. 이미지 풀과 Secret은 정상인데 컨테이너 생성이 거부됨</a:t>
             </a:r>
             <a:endParaRPr lang="en-US" sz="1350" dirty="0"/>
           </a:p>
@@ -5403,6 +5410,10 @@
           </a:solidFill>
           <a:ln/>
         </p:spPr>
+        <p:txBody>
+          <a:bodyPr/>
+          <a:p/>
+        </p:txBody>
       </p:sp>
       <p:sp>
         <p:nvSpPr>
@@ -5476,7 +5487,7 @@
                 <a:ea typeface="Calibri" pitchFamily="34" charset="-122"/>
                 <a:cs typeface="Calibri" pitchFamily="34" charset="-120"/>
               </a:rPr>
-              <a:t>kubectl describe pod의 Events에 원인 명시 — “runAsNonRoot and image has non-numeric user (appuser), cannot verify”</a:t>
+              <a:t>kubectl describe pod의 Events에 그대로 적혀 있었음: runAsNonRoot and image has non-numeric user (appuser), cannot verify</a:t>
             </a:r>
             <a:endParaRPr lang="en-US" sz="1350" dirty="0"/>
           </a:p>
@@ -5503,6 +5514,10 @@
           </a:solidFill>
           <a:ln/>
         </p:spPr>
+        <p:txBody>
+          <a:bodyPr/>
+          <a:p/>
+        </p:txBody>
       </p:sp>
       <p:sp>
         <p:nvSpPr>
@@ -5576,7 +5591,7 @@
                 <a:ea typeface="Calibri" pitchFamily="34" charset="-122"/>
                 <a:cs typeface="Calibri" pitchFamily="34" charset="-120"/>
               </a:rPr>
-              <a:t>이미지의 USER가 이름(appuser)뿐이라 kubelet이 시작 전에 UID를 판정 불가 — 이미지·매니페스트가 각자 올바른데 조합이 검증 불가능</a:t>
+              <a:t>이미지의 USER가 이름(appuser)뿐이라 kubelet이 시작 전에 UID를 알 수 없음. 이미지도 매니페스트도 각자는 맞는데 조합이 검증이 안 됨</a:t>
             </a:r>
             <a:endParaRPr lang="en-US" sz="1350" dirty="0"/>
           </a:p>
@@ -5603,6 +5618,10 @@
           </a:solidFill>
           <a:ln/>
         </p:spPr>
+        <p:txBody>
+          <a:bodyPr/>
+          <a:p/>
+        </p:txBody>
       </p:sp>
       <p:sp>
         <p:nvSpPr>
@@ -5651,7 +5670,7 @@
                 <a:ea typeface="Calibri" pitchFamily="34" charset="-122"/>
                 <a:cs typeface="Calibri" pitchFamily="34" charset="-120"/>
               </a:rPr>
-              <a:t>securityContext에 runAsUser: 1000 명시 — 재빌드 없이 즉시 해결. 근본 대책(Dockerfile 숫자 UID)은 백로그로</a:t>
+              <a:t>securityContext에 runAsUser: 1000을 명시해 재빌드 없이 해결. Dockerfile을 숫자 UID로 바꾸는 건 백로그</a:t>
             </a:r>
             <a:endParaRPr lang="en-US" sz="1400" dirty="0"/>
           </a:p>
@@ -5704,7 +5723,7 @@
                 <a:ea typeface="Cambria" pitchFamily="34" charset="-122"/>
                 <a:cs typeface="Cambria" pitchFamily="34" charset="-120"/>
               </a:rPr>
-              <a:t>보안 설정은 “각자 올바름”이 아니라 “조합이 검증 가능함”까지 확인해야 한다</a:t>
+              <a:t>보안 설정은 각각 맞는지가 아니라 조합해서 검증되는지까지 봐야 한다</a:t>
             </a:r>
             <a:endParaRPr lang="en-US" sz="1600" dirty="0"/>
           </a:p>
@@ -5775,7 +5794,7 @@
                 <a:ea typeface="Cambria" pitchFamily="34" charset="-122"/>
                 <a:cs typeface="Cambria" pitchFamily="34" charset="-120"/>
               </a:rPr>
-              <a:t>07. 구축 후 재점검 — 에러 없는 문제 찾기</a:t>
+              <a:t>07. 구축 후 재점검 - 에러 없는 문제 찾기</a:t>
             </a:r>
             <a:endParaRPr lang="en-US" sz="2800" dirty="0"/>
           </a:p>
@@ -5814,7 +5833,7 @@
                 <a:ea typeface="Calibri" pitchFamily="34" charset="-122"/>
                 <a:cs typeface="Calibri" pitchFamily="34" charset="-120"/>
               </a:rPr>
-              <a:t>PAGE 13</a:t>
+              <a:t>PAGE 15</a:t>
             </a:r>
             <a:endParaRPr lang="en-US" sz="1000" dirty="0"/>
           </a:p>
@@ -5848,6 +5867,10 @@
             </a:outerShdw>
           </a:effectLst>
         </p:spPr>
+        <p:txBody>
+          <a:bodyPr/>
+          <a:p/>
+        </p:txBody>
       </p:sp>
       <p:sp>
         <p:nvSpPr>
@@ -5921,7 +5944,7 @@
                 <a:ea typeface="Calibri" pitchFamily="34" charset="-122"/>
                 <a:cs typeface="Calibri" pitchFamily="34" charset="-120"/>
               </a:rPr>
-              <a:t>HPA가 늘린 파드를 ArgoCD가 되돌릴 구조를 배포 전에 발견</a:t>
+              <a:t>HPA가 늘린 파드를 ArgoCD가 도로 줄일 수 있는 구조를 배포 전에 발견</a:t>
             </a:r>
             <a:endParaRPr lang="en-US" sz="1250" dirty="0"/>
           </a:p>
@@ -5938,7 +5961,7 @@
                 <a:ea typeface="Calibri" pitchFamily="34" charset="-122"/>
                 <a:cs typeface="Calibri" pitchFamily="34" charset="-120"/>
               </a:rPr>
-              <a:t>→ replicas를 Git에서 빼서 소유권을 HPA에 이관</a:t>
+              <a:t>→ replicas를 Git에서 빼고 소유권을 HPA로</a:t>
             </a:r>
             <a:endParaRPr lang="en-US" sz="1250" dirty="0"/>
           </a:p>
@@ -5972,6 +5995,10 @@
             </a:outerShdw>
           </a:effectLst>
         </p:spPr>
+        <p:txBody>
+          <a:bodyPr/>
+          <a:p/>
+        </p:txBody>
       </p:sp>
       <p:sp>
         <p:nvSpPr>
@@ -6045,7 +6072,7 @@
                 <a:ea typeface="Calibri" pitchFamily="34" charset="-122"/>
                 <a:cs typeface="Calibri" pitchFamily="34" charset="-120"/>
               </a:rPr>
-              <a:t>배포 성공 판정 직후 응답 실패 1회를 그냥 넘기지 않고 추적</a:t>
+              <a:t>배포 성공 직후 응답 실패 1회를 그냥 넘기지 않고 추적</a:t>
             </a:r>
             <a:endParaRPr lang="en-US" sz="1250" dirty="0"/>
           </a:p>
@@ -6062,7 +6089,7 @@
                 <a:ea typeface="Calibri" pitchFamily="34" charset="-122"/>
                 <a:cs typeface="Calibri" pitchFamily="34" charset="-120"/>
               </a:rPr>
-              <a:t>→ 계층별 완료 기준의 차이 규명, Readiness Gate 백로그</a:t>
+              <a:t>→ 계층마다 완료 기준이 다르다는 걸 확인. Readiness Gate는 백로그</a:t>
             </a:r>
             <a:endParaRPr lang="en-US" sz="1250" dirty="0"/>
           </a:p>
@@ -6096,6 +6123,10 @@
             </a:outerShdw>
           </a:effectLst>
         </p:spPr>
+        <p:txBody>
+          <a:bodyPr/>
+          <a:p/>
+        </p:txBody>
       </p:sp>
       <p:sp>
         <p:nvSpPr>
@@ -6169,7 +6200,7 @@
                 <a:ea typeface="Calibri" pitchFamily="34" charset="-122"/>
                 <a:cs typeface="Calibri" pitchFamily="34" charset="-120"/>
               </a:rPr>
-              <a:t>증설 중 파드 Pending(“Too many pods”) — 노드 계층의 한계 확인</a:t>
+              <a:t>증설 중 파드 Pending(Too many pods). 노드 쪽 한계였음</a:t>
             </a:r>
             <a:endParaRPr lang="en-US" sz="1250" dirty="0"/>
           </a:p>
@@ -6186,7 +6217,7 @@
                 <a:ea typeface="Calibri" pitchFamily="34" charset="-122"/>
                 <a:cs typeface="Calibri" pitchFamily="34" charset="-120"/>
               </a:rPr>
-              <a:t>→ Cluster Autoscaler 도입의 실증 근거 확보</a:t>
+              <a:t>→ Cluster Autoscaler 도입 근거</a:t>
             </a:r>
             <a:endParaRPr lang="en-US" sz="1250" dirty="0"/>
           </a:p>
@@ -6220,6 +6251,10 @@
             </a:outerShdw>
           </a:effectLst>
         </p:spPr>
+        <p:txBody>
+          <a:bodyPr/>
+          <a:p/>
+        </p:txBody>
       </p:sp>
       <p:sp>
         <p:nvSpPr>
@@ -6293,7 +6328,7 @@
                 <a:ea typeface="Calibri" pitchFamily="34" charset="-122"/>
                 <a:cs typeface="Calibri" pitchFamily="34" charset="-120"/>
               </a:rPr>
-              <a:t>보수적 메모리 제한(256Mi)의 한계를 실사용에서 확인</a:t>
+              <a:t>메모리 제한 256Mi가 실사용에서는 부족했음</a:t>
             </a:r>
             <a:endParaRPr lang="en-US" sz="1250" dirty="0"/>
           </a:p>
@@ -6310,7 +6345,7 @@
                 <a:ea typeface="Calibri" pitchFamily="34" charset="-122"/>
                 <a:cs typeface="Calibri" pitchFamily="34" charset="-120"/>
               </a:rPr>
-              <a:t>→ 512Mi 상향을 실측 근거 주석과 함께 코드에 반영</a:t>
+              <a:t>→ 512Mi로 올리고 근거를 주석으로 코드에 남김</a:t>
             </a:r>
             <a:endParaRPr lang="en-US" sz="1250" dirty="0"/>
           </a:p>
@@ -6349,7 +6384,7 @@
                 <a:ea typeface="Calibri" pitchFamily="34" charset="-122"/>
                 <a:cs typeface="Calibri" pitchFamily="34" charset="-120"/>
               </a:rPr>
-              <a:t>동작한다고 끝이 아니다 — 에러 없이 지나가는 문제를 찾아 기록했다</a:t>
+              <a:t>돌아간다고 끝이 아니라, 에러 없이 지나가는 문제를 찾아 기록했습니다</a:t>
             </a:r>
             <a:endParaRPr lang="en-US" sz="1200" dirty="0"/>
           </a:p>
@@ -6459,7 +6494,7 @@
                 <a:ea typeface="Calibri" pitchFamily="34" charset="-122"/>
                 <a:cs typeface="Calibri" pitchFamily="34" charset="-120"/>
               </a:rPr>
-              <a:t>PAGE 14</a:t>
+              <a:t>PAGE 16</a:t>
             </a:r>
             <a:endParaRPr lang="en-US" sz="1000" dirty="0"/>
           </a:p>
@@ -6481,7 +6516,7 @@
         </p:nvGraphicFramePr>
         <p:xfrm>
           <a:off x="548640" y="1207008"/>
-          <a:ext cx="11064240" cy="914400"/>
+          <a:ext cx="11064240" cy="4760624"/>
         </p:xfrm>
         <a:graphic>
           <a:graphicData uri="http://schemas.openxmlformats.org/drawingml/2006/table">
@@ -6698,7 +6733,7 @@
                   </a:tcPr>
                 </a:tc>
               </a:tr>
-              <a:tr h="749808">
+              <a:tr h="620000">
                 <a:tc>
                   <a:txBody>
                     <a:bodyPr/>
@@ -6852,7 +6887,7 @@
                           <a:ea typeface="Calibri" pitchFamily="34" charset="-122"/>
                           <a:cs typeface="Calibri" pitchFamily="34" charset="-120"/>
                         </a:rPr>
-                        <a:t>CI 직접 배포 대비 자격증명이 클러스터 밖으로 안 나감 · drift 감지·자동 복구 — Git이 단일 진실 공급원</a:t>
+                        <a:t>CI가 직접 배포하는 방식과 달리 자격증명이 클러스터 밖으로 안 나감. drift 감지·자동 복구, Git이 단일 진실 공급원</a:t>
                       </a:r>
                       <a:endParaRPr lang="en-US" sz="1150" dirty="0">
                         <a:latin typeface="Calibri" charset="0"/>
@@ -6904,7 +6939,7 @@
                   </a:tcPr>
                 </a:tc>
               </a:tr>
-              <a:tr h="749808">
+              <a:tr h="620000">
                 <a:tc>
                   <a:txBody>
                     <a:bodyPr/>
@@ -7110,7 +7145,7 @@
                   </a:tcPr>
                 </a:tc>
               </a:tr>
-              <a:tr h="749808">
+              <a:tr h="620000">
                 <a:tc>
                   <a:txBody>
                     <a:bodyPr/>
@@ -7316,7 +7351,213 @@
                   </a:tcPr>
                 </a:tc>
               </a:tr>
-              <a:tr h="749808">
+              <a:tr h="620000">
+                <a:tc>
+                  <a:txBody>
+                    <a:bodyPr/>
+                    <a:lstStyle/>
+                    <a:p>
+                      <a:pPr algn="ctr" indent="0" marL="0">
+                        <a:buNone/>
+                      </a:pPr>
+                      <a:r>
+                        <a:rPr lang="en-US" sz="1250" b="1" dirty="0">
+                          <a:solidFill>
+                            <a:srgbClr val="1E2761"/>
+                          </a:solidFill>
+                          <a:latin typeface="Calibri" pitchFamily="34" charset="0"/>
+                          <a:ea typeface="Calibri" pitchFamily="34" charset="-122"/>
+                          <a:cs typeface="Calibri" pitchFamily="34" charset="-120"/>
+                        </a:rPr>
+                        <a:t>파드 상태</a:t>
+                      </a:r>
+                      <a:endParaRPr lang="en-US" sz="1250" dirty="0">
+                        <a:latin typeface="Calibri" charset="0"/>
+                        <a:ea typeface="Calibri" charset="0"/>
+                        <a:cs typeface="Calibri" charset="0"/>
+                      </a:endParaRPr>
+                    </a:p>
+                  </a:txBody>
+                  <a:tcPr marL="82296" marR="82296" marT="82296" marB="82296" anchor="ctr">
+                    <a:lnL w="12700" cap="flat" cmpd="sng" algn="ctr">
+                      <a:solidFill>
+                        <a:srgbClr val="E1E6F5"/>
+                      </a:solidFill>
+                      <a:prstDash val="solid"/>
+                      <a:round/>
+                      <a:headEnd type="none" w="med" len="med"/>
+                      <a:tailEnd type="none" w="med" len="med"/>
+                    </a:lnL>
+                    <a:lnR w="12700" cap="flat" cmpd="sng" algn="ctr">
+                      <a:solidFill>
+                        <a:srgbClr val="E1E6F5"/>
+                      </a:solidFill>
+                      <a:prstDash val="solid"/>
+                      <a:round/>
+                      <a:headEnd type="none" w="med" len="med"/>
+                      <a:tailEnd type="none" w="med" len="med"/>
+                    </a:lnR>
+                    <a:lnT w="12700" cap="flat" cmpd="sng" algn="ctr">
+                      <a:solidFill>
+                        <a:srgbClr val="E1E6F5"/>
+                      </a:solidFill>
+                      <a:prstDash val="solid"/>
+                      <a:round/>
+                      <a:headEnd type="none" w="med" len="med"/>
+                      <a:tailEnd type="none" w="med" len="med"/>
+                    </a:lnT>
+                    <a:lnB w="12700" cap="flat" cmpd="sng" algn="ctr">
+                      <a:solidFill>
+                        <a:srgbClr val="E1E6F5"/>
+                      </a:solidFill>
+                      <a:prstDash val="solid"/>
+                      <a:round/>
+                      <a:headEnd type="none" w="med" len="med"/>
+                      <a:tailEnd type="none" w="med" len="med"/>
+                    </a:lnB>
+                    <a:solidFill>
+                      <a:srgbClr val="FFFFFF"/>
+                    </a:solidFill>
+                  </a:tcPr>
+                </a:tc>
+                <a:tc>
+                  <a:txBody>
+                    <a:bodyPr/>
+                    <a:lstStyle/>
+                    <a:p>
+                      <a:pPr algn="ctr" indent="0" marL="0">
+                        <a:buNone/>
+                      </a:pPr>
+                      <a:r>
+                        <a:rPr lang="en-US" sz="1200" b="1" dirty="0">
+                          <a:solidFill>
+                            <a:srgbClr val="3556B8"/>
+                          </a:solidFill>
+                          <a:latin typeface="Calibri" pitchFamily="34" charset="0"/>
+                          <a:ea typeface="Calibri" pitchFamily="34" charset="-122"/>
+                          <a:cs typeface="Calibri" pitchFamily="34" charset="-120"/>
+                        </a:rPr>
+                        <a:t>stateless (상태는 RDS에)</a:t>
+                      </a:r>
+                      <a:endParaRPr lang="en-US" sz="1200" dirty="0">
+                        <a:latin typeface="Calibri" charset="0"/>
+                        <a:ea typeface="Calibri" charset="0"/>
+                        <a:cs typeface="Calibri" charset="0"/>
+                      </a:endParaRPr>
+                    </a:p>
+                  </a:txBody>
+                  <a:tcPr marL="82296" marR="82296" marT="82296" marB="82296" anchor="ctr">
+                    <a:lnL w="12700" cap="flat" cmpd="sng" algn="ctr">
+                      <a:solidFill>
+                        <a:srgbClr val="E1E6F5"/>
+                      </a:solidFill>
+                      <a:prstDash val="solid"/>
+                      <a:round/>
+                      <a:headEnd type="none" w="med" len="med"/>
+                      <a:tailEnd type="none" w="med" len="med"/>
+                    </a:lnL>
+                    <a:lnR w="12700" cap="flat" cmpd="sng" algn="ctr">
+                      <a:solidFill>
+                        <a:srgbClr val="E1E6F5"/>
+                      </a:solidFill>
+                      <a:prstDash val="solid"/>
+                      <a:round/>
+                      <a:headEnd type="none" w="med" len="med"/>
+                      <a:tailEnd type="none" w="med" len="med"/>
+                    </a:lnR>
+                    <a:lnT w="12700" cap="flat" cmpd="sng" algn="ctr">
+                      <a:solidFill>
+                        <a:srgbClr val="E1E6F5"/>
+                      </a:solidFill>
+                      <a:prstDash val="solid"/>
+                      <a:round/>
+                      <a:headEnd type="none" w="med" len="med"/>
+                      <a:tailEnd type="none" w="med" len="med"/>
+                    </a:lnT>
+                    <a:lnB w="12700" cap="flat" cmpd="sng" algn="ctr">
+                      <a:solidFill>
+                        <a:srgbClr val="E1E6F5"/>
+                      </a:solidFill>
+                      <a:prstDash val="solid"/>
+                      <a:round/>
+                      <a:headEnd type="none" w="med" len="med"/>
+                      <a:tailEnd type="none" w="med" len="med"/>
+                    </a:lnB>
+                    <a:solidFill>
+                      <a:srgbClr val="FFFFFF"/>
+                    </a:solidFill>
+                  </a:tcPr>
+                </a:tc>
+                <a:tc>
+                  <a:txBody>
+                    <a:bodyPr/>
+                    <a:lstStyle/>
+                    <a:p>
+                      <a:pPr indent="0" marL="0">
+                        <a:buNone/>
+                      </a:pPr>
+                      <a:r>
+                        <a:rPr lang="en-US" sz="1150" dirty="0">
+                          <a:solidFill>
+                            <a:srgbClr val="3A3F52"/>
+                          </a:solidFill>
+                          <a:latin typeface="Calibri" pitchFamily="34" charset="0"/>
+                          <a:ea typeface="Calibri" pitchFamily="34" charset="-122"/>
+                          <a:cs typeface="Calibri" pitchFamily="34" charset="-120"/>
+                        </a:rPr>
+                        <a:t>파드를 언제든 죽일 수 있어야 HPA 증감과 Spot 회수가 성립. 세션·파일을 파드 안에 두지 않음</a:t>
+                      </a:r>
+                      <a:endParaRPr lang="en-US" sz="1150" dirty="0">
+                        <a:latin typeface="Calibri" charset="0"/>
+                        <a:ea typeface="Calibri" charset="0"/>
+                        <a:cs typeface="Calibri" charset="0"/>
+                      </a:endParaRPr>
+                    </a:p>
+                  </a:txBody>
+                  <a:tcPr marL="82296" marR="82296" marT="82296" marB="82296" anchor="ctr">
+                    <a:lnL w="12700" cap="flat" cmpd="sng" algn="ctr">
+                      <a:solidFill>
+                        <a:srgbClr val="E1E6F5"/>
+                      </a:solidFill>
+                      <a:prstDash val="solid"/>
+                      <a:round/>
+                      <a:headEnd type="none" w="med" len="med"/>
+                      <a:tailEnd type="none" w="med" len="med"/>
+                    </a:lnL>
+                    <a:lnR w="12700" cap="flat" cmpd="sng" algn="ctr">
+                      <a:solidFill>
+                        <a:srgbClr val="E1E6F5"/>
+                      </a:solidFill>
+                      <a:prstDash val="solid"/>
+                      <a:round/>
+                      <a:headEnd type="none" w="med" len="med"/>
+                      <a:tailEnd type="none" w="med" len="med"/>
+                    </a:lnR>
+                    <a:lnT w="12700" cap="flat" cmpd="sng" algn="ctr">
+                      <a:solidFill>
+                        <a:srgbClr val="E1E6F5"/>
+                      </a:solidFill>
+                      <a:prstDash val="solid"/>
+                      <a:round/>
+                      <a:headEnd type="none" w="med" len="med"/>
+                      <a:tailEnd type="none" w="med" len="med"/>
+                    </a:lnT>
+                    <a:lnB w="12700" cap="flat" cmpd="sng" algn="ctr">
+                      <a:solidFill>
+                        <a:srgbClr val="E1E6F5"/>
+                      </a:solidFill>
+                      <a:prstDash val="solid"/>
+                      <a:round/>
+                      <a:headEnd type="none" w="med" len="med"/>
+                      <a:tailEnd type="none" w="med" len="med"/>
+                    </a:lnB>
+                    <a:solidFill>
+                      <a:srgbClr val="FFFFFF"/>
+                    </a:solidFill>
+                  </a:tcPr>
+                </a:tc>
+              </a:tr>
+              <a:tr h="620000">
                 <a:tc>
                   <a:txBody>
                     <a:bodyPr/>
@@ -7470,7 +7711,7 @@
                           <a:ea typeface="Calibri" pitchFamily="34" charset="-122"/>
                           <a:cs typeface="Calibri" pitchFamily="34" charset="-120"/>
                         </a:rPr>
-                        <a:t>현업에서 운영 중인 솔루션 DB와 동일 버전 — 경력 연속성. 재생성 구조라 코드 한 줄 변경</a:t>
+                        <a:t>현업에서 운영 중인 솔루션 DB와 같은 버전. 재생성 구조라 코드 한 줄만 바꿈</a:t>
                       </a:r>
                       <a:endParaRPr lang="en-US" sz="1150" dirty="0">
                         <a:latin typeface="Calibri" charset="0"/>
@@ -7522,7 +7763,7 @@
                   </a:tcPr>
                 </a:tc>
               </a:tr>
-              <a:tr h="749808">
+              <a:tr h="620000">
                 <a:tc>
                   <a:txBody>
                     <a:bodyPr/>
@@ -7728,7 +7969,7 @@
                   </a:tcPr>
                 </a:tc>
               </a:tr>
-              <a:tr h="749808">
+              <a:tr h="620000">
                 <a:tc>
                   <a:txBody>
                     <a:bodyPr/>
@@ -7882,7 +8123,7 @@
                           <a:ea typeface="Calibri" pitchFamily="34" charset="-122"/>
                           <a:cs typeface="Calibri" pitchFamily="34" charset="-120"/>
                         </a:rPr>
-                        <a:t>Secrets Manager는 규모 대비 과잉 — 코드·이미지·repo에 비밀값 0 충족 / 단, tfvars·state 평문 한계는 인지 — 운영 전환 시 Secrets Manager 검토</a:t>
+                        <a:t>Secrets Manager는 이 규모엔 과함. 코드·이미지·repo에 비밀값 0은 충족. tfvars·state 평문 한계는 알고 있고, 운영 전환 시 Secrets Manager 검토</a:t>
                       </a:r>
                       <a:endParaRPr lang="en-US" sz="1150" dirty="0">
                         <a:latin typeface="Calibri" charset="0"/>
@@ -7971,7 +8212,7 @@
                 <a:ea typeface="Calibri" pitchFamily="34" charset="-122"/>
                 <a:cs typeface="Calibri" pitchFamily="34" charset="-120"/>
               </a:rPr>
-              <a:t>“과하지 않게” — 서비스 메시 · 멀티클러스터 · Karpenter는 규모 대비 과잉으로 판단해 의도적으로 제외 (상세 근거는 repo의 ADR 참조)</a:t>
+              <a:t>과하지 않게: 서비스 메시, 멀티클러스터, Karpenter는 규모에 안 맞아 뺐습니다 (근거는 repo의 ADR)</a:t>
             </a:r>
             <a:endParaRPr lang="en-US" sz="1150" dirty="0"/>
           </a:p>
@@ -7987,7 +8228,7 @@
 
 <file path=ppt/slides/slide17.xml><?xml version="1.0" encoding="utf-8"?>
 <p:sld xmlns:a="http://schemas.openxmlformats.org/drawingml/2006/main" xmlns:r="http://schemas.openxmlformats.org/officeDocument/2006/relationships" xmlns:p="http://schemas.openxmlformats.org/presentationml/2006/main">
-  <p:cSld name="Slide 2">
+  <p:cSld name="Slide 3">
     <p:bg>
       <p:bgPr>
         <a:solidFill>
@@ -8042,7 +8283,7 @@
                 <a:ea typeface="Cambria" pitchFamily="34" charset="-122"/>
                 <a:cs typeface="Cambria" pitchFamily="34" charset="-120"/>
               </a:rPr>
-              <a:t>09. IaC 기반 비용 통제</a:t>
+              <a:t>09. 마무리 - 운영 경험이 설계에 어떻게 쓰였나</a:t>
             </a:r>
             <a:endParaRPr lang="en-US" sz="2800" dirty="0"/>
           </a:p>
@@ -8081,7 +8322,7 @@
                 <a:ea typeface="Calibri" pitchFamily="34" charset="-122"/>
                 <a:cs typeface="Calibri" pitchFamily="34" charset="-120"/>
               </a:rPr>
-              <a:t>PAGE 15</a:t>
+              <a:t>PAGE 17</a:t>
             </a:r>
             <a:endParaRPr lang="en-US" sz="1000" dirty="0"/>
           </a:p>
@@ -8095,12 +8336,91 @@
         </p:nvSpPr>
         <p:spPr>
           <a:xfrm>
-            <a:off x="548640" y="1234440"/>
-            <a:ext cx="3520440" cy="1874520"/>
+            <a:off x="548640" y="1143000"/>
+            <a:ext cx="11064240" cy="777240"/>
           </a:xfrm>
           <a:prstGeom prst="roundRect">
             <a:avLst>
-              <a:gd name="adj" fmla="val 4390"/>
+              <a:gd name="adj" fmla="val 10588"/>
+            </a:avLst>
+          </a:prstGeom>
+          <a:solidFill>
+            <a:srgbClr val="F4F6FC"/>
+          </a:solidFill>
+          <a:ln/>
+        </p:spPr>
+        <p:txBody>
+          <a:bodyPr/>
+          <a:p/>
+        </p:txBody>
+      </p:sp>
+      <p:sp>
+        <p:nvSpPr>
+          <p:cNvPr id="5" name="Text 3"/>
+          <p:cNvSpPr/>
+          <p:nvPr/>
+        </p:nvSpPr>
+        <p:spPr>
+          <a:xfrm>
+            <a:off x="868680" y="1143000"/>
+            <a:ext cx="10424160" cy="777240"/>
+          </a:xfrm>
+          <a:prstGeom prst="rect">
+            <a:avLst/>
+          </a:prstGeom>
+          <a:noFill/>
+          <a:ln/>
+        </p:spPr>
+        <p:txBody>
+          <a:bodyPr wrap="square" lIns="0" tIns="0" rIns="0" bIns="0" rtlCol="0" anchor="ctr"/>
+          <a:lstStyle/>
+          <a:p>
+            <a:pPr indent="0" marL="0">
+              <a:buNone/>
+            </a:pPr>
+            <a:r>
+              <a:rPr lang="en-US" sz="1600" b="1" dirty="0">
+                <a:solidFill>
+                  <a:srgbClr val="3556B8"/>
+                </a:solidFill>
+                <a:latin typeface="Calibri" pitchFamily="34" charset="0"/>
+                <a:ea typeface="Calibri" pitchFamily="34" charset="-122"/>
+                <a:cs typeface="Calibri" pitchFamily="34" charset="-120"/>
+              </a:rPr>
+              <a:t>A.  </a:t>
+            </a:r>
+            <a:pPr indent="0" marL="0">
+              <a:buNone/>
+            </a:pPr>
+            <a:r>
+              <a:rPr lang="en-US" sz="1500" b="1" dirty="0">
+                <a:solidFill>
+                  <a:srgbClr val="1E2761"/>
+                </a:solidFill>
+                <a:latin typeface="Calibri" pitchFamily="34" charset="0"/>
+                <a:ea typeface="Calibri" pitchFamily="34" charset="-122"/>
+                <a:cs typeface="Calibri" pitchFamily="34" charset="-120"/>
+              </a:rPr>
+              <a:t>고객 클라우드를 관제·운영하며 쌓인 판단 기준이 이 프로젝트의 설계 근거가 됐습니다</a:t>
+            </a:r>
+            <a:endParaRPr lang="en-US" sz="1600" dirty="0"/>
+          </a:p>
+        </p:txBody>
+      </p:sp>
+      <p:sp>
+        <p:nvSpPr>
+          <p:cNvPr id="6" name="Shape 4"/>
+          <p:cNvSpPr/>
+          <p:nvPr/>
+        </p:nvSpPr>
+        <p:spPr>
+          <a:xfrm>
+            <a:off x="548640" y="2194560"/>
+            <a:ext cx="5394960" cy="3977640"/>
+          </a:xfrm>
+          <a:prstGeom prst="roundRect">
+            <a:avLst>
+              <a:gd name="adj" fmla="val 2069"/>
             </a:avLst>
           </a:prstGeom>
           <a:solidFill>
@@ -8115,72 +8435,37 @@
             </a:outerShdw>
           </a:effectLst>
         </p:spPr>
-      </p:sp>
-      <p:sp>
-        <p:nvSpPr>
-          <p:cNvPr id="5" name="Text 3"/>
-          <p:cNvSpPr/>
-          <p:nvPr/>
-        </p:nvSpPr>
-        <p:spPr>
-          <a:xfrm>
-            <a:off x="731520" y="1417320"/>
-            <a:ext cx="3154680" cy="320040"/>
-          </a:xfrm>
-          <a:prstGeom prst="rect">
-            <a:avLst/>
-          </a:prstGeom>
-          <a:noFill/>
-          <a:ln/>
-        </p:spPr>
-        <p:txBody>
-          <a:bodyPr wrap="square" lIns="0" tIns="0" rIns="0" bIns="0" rtlCol="0" anchor="ctr"/>
-          <a:lstStyle/>
-          <a:p>
-            <a:pPr algn="ctr" indent="0" marL="0">
-              <a:buNone/>
-            </a:pPr>
-            <a:r>
-              <a:rPr lang="en-US" sz="1250" b="1" dirty="0">
-                <a:solidFill>
-                  <a:srgbClr val="6B7089"/>
-                </a:solidFill>
-                <a:latin typeface="Calibri" pitchFamily="34" charset="0"/>
-                <a:ea typeface="Calibri" pitchFamily="34" charset="-122"/>
-                <a:cs typeface="Calibri" pitchFamily="34" charset="-120"/>
-              </a:rPr>
-              <a:t>상시 가동 시 예상</a:t>
-            </a:r>
-            <a:endParaRPr lang="en-US" sz="1250" dirty="0"/>
-          </a:p>
-        </p:txBody>
-      </p:sp>
-      <p:sp>
-        <p:nvSpPr>
-          <p:cNvPr id="6" name="Text 4"/>
-          <p:cNvSpPr/>
-          <p:nvPr/>
-        </p:nvSpPr>
-        <p:spPr>
-          <a:xfrm>
-            <a:off x="731520" y="1783080"/>
-            <a:ext cx="3154680" cy="777240"/>
-          </a:xfrm>
-          <a:prstGeom prst="rect">
-            <a:avLst/>
-          </a:prstGeom>
-          <a:noFill/>
-          <a:ln/>
-        </p:spPr>
-        <p:txBody>
-          <a:bodyPr wrap="square" lIns="0" tIns="0" rIns="0" bIns="0" rtlCol="0" anchor="ctr"/>
-          <a:lstStyle/>
-          <a:p>
-            <a:pPr algn="ctr" indent="0" marL="0">
-              <a:buNone/>
-            </a:pPr>
-            <a:r>
-              <a:rPr lang="en-US" sz="4400" b="1" dirty="0">
+        <p:txBody>
+          <a:bodyPr/>
+          <a:p/>
+        </p:txBody>
+      </p:sp>
+      <p:sp>
+        <p:nvSpPr>
+          <p:cNvPr id="7" name="Text 5"/>
+          <p:cNvSpPr/>
+          <p:nvPr/>
+        </p:nvSpPr>
+        <p:spPr>
+          <a:xfrm>
+            <a:off x="868680" y="2423160"/>
+            <a:ext cx="4754880" cy="411480"/>
+          </a:xfrm>
+          <a:prstGeom prst="rect">
+            <a:avLst/>
+          </a:prstGeom>
+          <a:noFill/>
+          <a:ln/>
+        </p:spPr>
+        <p:txBody>
+          <a:bodyPr wrap="square" lIns="0" tIns="0" rIns="0" bIns="0" rtlCol="0" anchor="ctr"/>
+          <a:lstStyle/>
+          <a:p>
+            <a:pPr indent="0" marL="0">
+              <a:buNone/>
+            </a:pPr>
+            <a:r>
+              <a:rPr lang="en-US" sz="1700" b="1" dirty="0">
                 <a:solidFill>
                   <a:srgbClr val="1E2761"/>
                 </a:solidFill>
@@ -8188,69 +8473,175 @@
                 <a:ea typeface="Cambria" pitchFamily="34" charset="-122"/>
                 <a:cs typeface="Cambria" pitchFamily="34" charset="-120"/>
               </a:rPr>
-              <a:t>$164</a:t>
-            </a:r>
-            <a:endParaRPr lang="en-US" sz="4400" dirty="0"/>
-          </a:p>
-        </p:txBody>
-      </p:sp>
-      <p:sp>
-        <p:nvSpPr>
-          <p:cNvPr id="7" name="Text 5"/>
-          <p:cNvSpPr/>
-          <p:nvPr/>
-        </p:nvSpPr>
-        <p:spPr>
-          <a:xfrm>
-            <a:off x="731520" y="2651760"/>
-            <a:ext cx="3154680" cy="320040"/>
-          </a:xfrm>
-          <a:prstGeom prst="rect">
-            <a:avLst/>
-          </a:prstGeom>
-          <a:noFill/>
-          <a:ln/>
-        </p:spPr>
-        <p:txBody>
-          <a:bodyPr wrap="square" lIns="0" tIns="0" rIns="0" bIns="0" rtlCol="0" anchor="ctr"/>
-          <a:lstStyle/>
-          <a:p>
-            <a:pPr algn="ctr" indent="0" marL="0">
-              <a:buNone/>
-            </a:pPr>
-            <a:r>
-              <a:rPr lang="en-US" sz="1200" dirty="0">
-                <a:solidFill>
-                  <a:srgbClr val="6B7089"/>
-                </a:solidFill>
-                <a:latin typeface="Calibri" pitchFamily="34" charset="0"/>
-                <a:ea typeface="Calibri" pitchFamily="34" charset="-122"/>
-                <a:cs typeface="Calibri" pitchFamily="34" charset="-120"/>
-              </a:rPr>
-              <a:t>/ 월 (≈ 23만원)</a:t>
-            </a:r>
-            <a:endParaRPr lang="en-US" sz="1200" dirty="0"/>
-          </a:p>
-        </p:txBody>
-      </p:sp>
-      <p:sp>
-        <p:nvSpPr>
-          <p:cNvPr id="8" name="Shape 6"/>
-          <p:cNvSpPr/>
-          <p:nvPr/>
-        </p:nvSpPr>
-        <p:spPr>
-          <a:xfrm>
-            <a:off x="4343400" y="1234440"/>
-            <a:ext cx="3520440" cy="1874520"/>
+              <a:t>기존 운영 관점 (Before)</a:t>
+            </a:r>
+            <a:endParaRPr lang="en-US" sz="1700" dirty="0"/>
+          </a:p>
+        </p:txBody>
+      </p:sp>
+      <p:sp>
+        <p:nvSpPr>
+          <p:cNvPr id="8" name="Text 6"/>
+          <p:cNvSpPr/>
+          <p:nvPr/>
+        </p:nvSpPr>
+        <p:spPr>
+          <a:xfrm>
+            <a:off x="868680" y="2852928"/>
+            <a:ext cx="4754880" cy="320040"/>
+          </a:xfrm>
+          <a:prstGeom prst="rect">
+            <a:avLst/>
+          </a:prstGeom>
+          <a:noFill/>
+          <a:ln/>
+        </p:spPr>
+        <p:txBody>
+          <a:bodyPr wrap="square" lIns="0" tIns="0" rIns="0" bIns="0" rtlCol="0" anchor="ctr"/>
+          <a:lstStyle/>
+          <a:p>
+            <a:pPr indent="0" marL="0">
+              <a:buNone/>
+            </a:pPr>
+            <a:r>
+              <a:rPr lang="en-US" sz="1150" b="1" dirty="0">
+                <a:solidFill>
+                  <a:srgbClr val="5B79D6"/>
+                </a:solidFill>
+                <a:latin typeface="Calibri" pitchFamily="34" charset="0"/>
+                <a:ea typeface="Calibri" pitchFamily="34" charset="-122"/>
+                <a:cs typeface="Calibri" pitchFamily="34" charset="-120"/>
+              </a:rPr>
+              <a:t>ZENIUS 관제 · KT/NHN/Naver Cloud 운영</a:t>
+            </a:r>
+            <a:endParaRPr lang="en-US" sz="1150" dirty="0"/>
+          </a:p>
+        </p:txBody>
+      </p:sp>
+      <p:sp>
+        <p:nvSpPr>
+          <p:cNvPr id="9" name="Text 7"/>
+          <p:cNvSpPr/>
+          <p:nvPr/>
+        </p:nvSpPr>
+        <p:spPr>
+          <a:xfrm>
+            <a:off x="868680" y="3337560"/>
+            <a:ext cx="4800600" cy="2651760"/>
+          </a:xfrm>
+          <a:prstGeom prst="rect">
+            <a:avLst/>
+          </a:prstGeom>
+          <a:noFill/>
+          <a:ln/>
+        </p:spPr>
+        <p:txBody>
+          <a:bodyPr wrap="square" lIns="0" tIns="0" rIns="0" bIns="0" rtlCol="0" anchor="t"/>
+          <a:lstStyle/>
+          <a:p>
+            <a:pPr marL="342900" indent="-342900">
+              <a:spcAft>
+                <a:spcPts val="1100"/>
+              </a:spcAft>
+              <a:buSzPct val="100000"/>
+              <a:buChar char="•"/>
+            </a:pPr>
+            <a:r>
+              <a:rPr lang="en-US" sz="1250" dirty="0">
+                <a:solidFill>
+                  <a:srgbClr val="3A3F52"/>
+                </a:solidFill>
+                <a:latin typeface="Calibri" pitchFamily="34" charset="0"/>
+                <a:ea typeface="Calibri" pitchFamily="34" charset="-122"/>
+                <a:cs typeface="Calibri" pitchFamily="34" charset="-120"/>
+              </a:rPr>
+              <a:t>남이 정한 임계값과 경보에 대응</a:t>
+            </a:r>
+            <a:endParaRPr lang="en-US" sz="1250" dirty="0"/>
+          </a:p>
+          <a:p>
+            <a:pPr marL="342900" indent="-342900">
+              <a:spcAft>
+                <a:spcPts val="1100"/>
+              </a:spcAft>
+              <a:buSzPct val="100000"/>
+              <a:buChar char="•"/>
+            </a:pPr>
+            <a:r>
+              <a:rPr lang="en-US" sz="1250" dirty="0">
+                <a:solidFill>
+                  <a:srgbClr val="3A3F52"/>
+                </a:solidFill>
+                <a:latin typeface="Calibri" pitchFamily="34" charset="0"/>
+                <a:ea typeface="Calibri" pitchFamily="34" charset="-122"/>
+                <a:cs typeface="Calibri" pitchFamily="34" charset="-120"/>
+              </a:rPr>
+              <a:t>고객 환경의 장애를 분석해 보고</a:t>
+            </a:r>
+            <a:endParaRPr lang="en-US" sz="1250" dirty="0"/>
+          </a:p>
+          <a:p>
+            <a:pPr marL="342900" indent="-342900">
+              <a:spcAft>
+                <a:spcPts val="1100"/>
+              </a:spcAft>
+              <a:buSzPct val="100000"/>
+              <a:buChar char="•"/>
+            </a:pPr>
+            <a:r>
+              <a:rPr lang="en-US" sz="1250" dirty="0">
+                <a:solidFill>
+                  <a:srgbClr val="3A3F52"/>
+                </a:solidFill>
+                <a:latin typeface="Calibri" pitchFamily="34" charset="0"/>
+                <a:ea typeface="Calibri" pitchFamily="34" charset="-122"/>
+                <a:cs typeface="Calibri" pitchFamily="34" charset="-120"/>
+              </a:rPr>
+              <a:t>정해진 절차로 서버·DB·백업 점검</a:t>
+            </a:r>
+            <a:endParaRPr lang="en-US" sz="1250" dirty="0"/>
+          </a:p>
+          <a:p>
+            <a:pPr marL="342900" indent="-342900">
+              <a:spcAft>
+                <a:spcPts val="1100"/>
+              </a:spcAft>
+              <a:buSzPct val="100000"/>
+              <a:buChar char="•"/>
+            </a:pPr>
+            <a:r>
+              <a:rPr lang="en-US" sz="1250" dirty="0">
+                <a:solidFill>
+                  <a:srgbClr val="3A3F52"/>
+                </a:solidFill>
+                <a:latin typeface="Calibri" pitchFamily="34" charset="0"/>
+                <a:ea typeface="Calibri" pitchFamily="34" charset="-122"/>
+                <a:cs typeface="Calibri" pitchFamily="34" charset="-120"/>
+              </a:rPr>
+              <a:t>Docker 이미지로 환경 표준화 (제공 시간 40% 단축)</a:t>
+            </a:r>
+            <a:endParaRPr lang="en-US" sz="1250" dirty="0"/>
+          </a:p>
+        </p:txBody>
+      </p:sp>
+      <p:sp>
+        <p:nvSpPr>
+          <p:cNvPr id="10" name="Shape 8"/>
+          <p:cNvSpPr/>
+          <p:nvPr/>
+        </p:nvSpPr>
+        <p:spPr>
+          <a:xfrm>
+            <a:off x="6217920" y="2194560"/>
+            <a:ext cx="5394960" cy="3977640"/>
           </a:xfrm>
           <a:prstGeom prst="roundRect">
             <a:avLst>
-              <a:gd name="adj" fmla="val 4390"/>
+              <a:gd name="adj" fmla="val 2069"/>
             </a:avLst>
           </a:prstGeom>
           <a:solidFill>
-            <a:srgbClr val="0B3B33"/>
+            <a:srgbClr val="E8EEFB"/>
           </a:solidFill>
           <a:ln/>
           <a:effectLst>
@@ -8261,152 +8652,88 @@
             </a:outerShdw>
           </a:effectLst>
         </p:spPr>
-      </p:sp>
-      <p:sp>
-        <p:nvSpPr>
-          <p:cNvPr id="9" name="Text 7"/>
-          <p:cNvSpPr/>
-          <p:nvPr/>
-        </p:nvSpPr>
-        <p:spPr>
-          <a:xfrm>
-            <a:off x="4526280" y="1417320"/>
-            <a:ext cx="3154680" cy="320040"/>
-          </a:xfrm>
-          <a:prstGeom prst="rect">
-            <a:avLst/>
-          </a:prstGeom>
-          <a:noFill/>
-          <a:ln/>
-        </p:spPr>
-        <p:txBody>
-          <a:bodyPr wrap="square" lIns="0" tIns="0" rIns="0" bIns="0" rtlCol="0" anchor="ctr"/>
-          <a:lstStyle/>
-          <a:p>
-            <a:pPr algn="ctr" indent="0" marL="0">
-              <a:buNone/>
-            </a:pPr>
-            <a:r>
-              <a:rPr lang="en-US" sz="1250" b="1" dirty="0">
-                <a:solidFill>
-                  <a:srgbClr val="9FE1CB"/>
-                </a:solidFill>
-                <a:latin typeface="Calibri" pitchFamily="34" charset="0"/>
-                <a:ea typeface="Calibri" pitchFamily="34" charset="-122"/>
-                <a:cs typeface="Calibri" pitchFamily="34" charset="-120"/>
-              </a:rPr>
-              <a:t>7월 실사용 (청구서 확정)</a:t>
-            </a:r>
-            <a:endParaRPr lang="en-US" sz="1250" dirty="0"/>
-          </a:p>
-        </p:txBody>
-      </p:sp>
-      <p:sp>
-        <p:nvSpPr>
-          <p:cNvPr id="10" name="Text 8"/>
-          <p:cNvSpPr/>
-          <p:nvPr/>
-        </p:nvSpPr>
-        <p:spPr>
-          <a:xfrm>
-            <a:off x="4526280" y="1783080"/>
-            <a:ext cx="3154680" cy="777240"/>
-          </a:xfrm>
-          <a:prstGeom prst="rect">
-            <a:avLst/>
-          </a:prstGeom>
-          <a:noFill/>
-          <a:ln/>
-        </p:spPr>
-        <p:txBody>
-          <a:bodyPr wrap="square" lIns="0" tIns="0" rIns="0" bIns="0" rtlCol="0" anchor="ctr"/>
-          <a:lstStyle/>
-          <a:p>
-            <a:pPr algn="ctr" indent="0" marL="0">
-              <a:buNone/>
-            </a:pPr>
-            <a:r>
-              <a:rPr lang="en-US" sz="4400" b="1" dirty="0">
-                <a:solidFill>
-                  <a:srgbClr val="FFFFFF"/>
+        <p:txBody>
+          <a:bodyPr/>
+          <a:p/>
+        </p:txBody>
+      </p:sp>
+      <p:sp>
+        <p:nvSpPr>
+          <p:cNvPr id="11" name="Text 9"/>
+          <p:cNvSpPr/>
+          <p:nvPr/>
+        </p:nvSpPr>
+        <p:spPr>
+          <a:xfrm>
+            <a:off x="6537960" y="2423160"/>
+            <a:ext cx="4754880" cy="411480"/>
+          </a:xfrm>
+          <a:prstGeom prst="rect">
+            <a:avLst/>
+          </a:prstGeom>
+          <a:noFill/>
+          <a:ln/>
+        </p:spPr>
+        <p:txBody>
+          <a:bodyPr wrap="square" lIns="0" tIns="0" rIns="0" bIns="0" rtlCol="0" anchor="ctr"/>
+          <a:lstStyle/>
+          <a:p>
+            <a:pPr indent="0" marL="0">
+              <a:buNone/>
+            </a:pPr>
+            <a:r>
+              <a:rPr lang="en-US" sz="1700" b="1" dirty="0">
+                <a:solidFill>
+                  <a:srgbClr val="1E2761"/>
                 </a:solidFill>
                 <a:latin typeface="Cambria" pitchFamily="34" charset="0"/>
                 <a:ea typeface="Cambria" pitchFamily="34" charset="-122"/>
                 <a:cs typeface="Cambria" pitchFamily="34" charset="-120"/>
               </a:rPr>
-              <a:t>$1.27</a:t>
-            </a:r>
-            <a:endParaRPr lang="en-US" sz="4400" dirty="0"/>
-          </a:p>
-        </p:txBody>
-      </p:sp>
-      <p:sp>
-        <p:nvSpPr>
-          <p:cNvPr id="11" name="Text 9"/>
-          <p:cNvSpPr/>
-          <p:nvPr/>
-        </p:nvSpPr>
-        <p:spPr>
-          <a:xfrm>
-            <a:off x="4526280" y="2651760"/>
-            <a:ext cx="3154680" cy="320040"/>
-          </a:xfrm>
-          <a:prstGeom prst="rect">
-            <a:avLst/>
-          </a:prstGeom>
-          <a:noFill/>
-          <a:ln/>
-        </p:spPr>
-        <p:txBody>
-          <a:bodyPr wrap="square" lIns="0" tIns="0" rIns="0" bIns="0" rtlCol="0" anchor="ctr"/>
-          <a:lstStyle/>
-          <a:p>
-            <a:pPr algn="ctr" indent="0" marL="0">
-              <a:buNone/>
-            </a:pPr>
-            <a:r>
-              <a:rPr lang="en-US" sz="1200" dirty="0">
-                <a:solidFill>
-                  <a:srgbClr val="9FE1CB"/>
-                </a:solidFill>
-                <a:latin typeface="Calibri" pitchFamily="34" charset="0"/>
-                <a:ea typeface="Calibri" pitchFamily="34" charset="-122"/>
-                <a:cs typeface="Calibri" pitchFamily="34" charset="-120"/>
-              </a:rPr>
-              <a:t>약 99.2% 감소</a:t>
-            </a:r>
-            <a:endParaRPr lang="en-US" sz="1200" dirty="0"/>
-          </a:p>
-        </p:txBody>
-      </p:sp>
-      <p:sp>
-        <p:nvSpPr>
-          <p:cNvPr id="12" name="Shape 10"/>
-          <p:cNvSpPr/>
-          <p:nvPr/>
-        </p:nvSpPr>
-        <p:spPr>
-          <a:xfrm>
-            <a:off x="8138160" y="1234440"/>
-            <a:ext cx="3520440" cy="1874520"/>
-          </a:xfrm>
-          <a:prstGeom prst="roundRect">
-            <a:avLst>
-              <a:gd name="adj" fmla="val 4390"/>
-            </a:avLst>
-          </a:prstGeom>
-          <a:solidFill>
-            <a:srgbClr val="1E2761"/>
-          </a:solidFill>
-          <a:ln/>
-          <a:effectLst>
-            <a:outerShdw sx="100000" sy="100000" kx="0" ky="0" algn="bl" rotWithShape="0" blurRad="76200" dist="25400" dir="5400000">
-              <a:srgbClr val="9AA3C0">
-                <a:alpha val="30000"/>
-              </a:srgbClr>
-            </a:outerShdw>
-          </a:effectLst>
-        </p:spPr>
+              <a:t>새로운 관점 (After)</a:t>
+            </a:r>
+            <a:endParaRPr lang="en-US" sz="1700" dirty="0"/>
+          </a:p>
+        </p:txBody>
+      </p:sp>
+      <p:sp>
+        <p:nvSpPr>
+          <p:cNvPr id="12" name="Text 10"/>
+          <p:cNvSpPr/>
+          <p:nvPr/>
+        </p:nvSpPr>
+        <p:spPr>
+          <a:xfrm>
+            <a:off x="6537960" y="2852928"/>
+            <a:ext cx="4754880" cy="320040"/>
+          </a:xfrm>
+          <a:prstGeom prst="rect">
+            <a:avLst/>
+          </a:prstGeom>
+          <a:noFill/>
+          <a:ln/>
+        </p:spPr>
+        <p:txBody>
+          <a:bodyPr wrap="square" lIns="0" tIns="0" rIns="0" bIns="0" rtlCol="0" anchor="ctr"/>
+          <a:lstStyle/>
+          <a:p>
+            <a:pPr indent="0" marL="0">
+              <a:buNone/>
+            </a:pPr>
+            <a:r>
+              <a:rPr lang="en-US" sz="1150" b="1" dirty="0">
+                <a:solidFill>
+                  <a:srgbClr val="5B79D6"/>
+                </a:solidFill>
+                <a:latin typeface="Calibri" pitchFamily="34" charset="0"/>
+                <a:ea typeface="Calibri" pitchFamily="34" charset="-122"/>
+                <a:cs typeface="Calibri" pitchFamily="34" charset="-120"/>
+              </a:rPr>
+              <a:t>이 프로젝트 - 직접 설계·검증</a:t>
+            </a:r>
+            <a:endParaRPr lang="en-US" sz="1150" dirty="0"/>
+          </a:p>
+        </p:txBody>
       </p:sp>
       <p:sp>
         <p:nvSpPr>
@@ -8416,155 +8743,49 @@
         </p:nvSpPr>
         <p:spPr>
           <a:xfrm>
-            <a:off x="8321040" y="1417320"/>
-            <a:ext cx="3154680" cy="320040"/>
-          </a:xfrm>
-          <a:prstGeom prst="rect">
-            <a:avLst/>
-          </a:prstGeom>
-          <a:noFill/>
-          <a:ln/>
-        </p:spPr>
-        <p:txBody>
-          <a:bodyPr wrap="square" lIns="0" tIns="0" rIns="0" bIns="0" rtlCol="0" anchor="ctr"/>
-          <a:lstStyle/>
-          <a:p>
-            <a:pPr algn="ctr" indent="0" marL="0">
-              <a:buNone/>
-            </a:pPr>
-            <a:r>
-              <a:rPr lang="en-US" sz="1250" b="1" dirty="0">
-                <a:solidFill>
-                  <a:srgbClr val="CADCFC"/>
-                </a:solidFill>
-                <a:latin typeface="Calibri" pitchFamily="34" charset="0"/>
-                <a:ea typeface="Calibri" pitchFamily="34" charset="-122"/>
-                <a:cs typeface="Calibri" pitchFamily="34" charset="-120"/>
-              </a:rPr>
-              <a:t>실제 카드 청구액</a:t>
+            <a:off x="6537960" y="3337560"/>
+            <a:ext cx="4800600" cy="2651760"/>
+          </a:xfrm>
+          <a:prstGeom prst="rect">
+            <a:avLst/>
+          </a:prstGeom>
+          <a:noFill/>
+          <a:ln/>
+        </p:spPr>
+        <p:txBody>
+          <a:bodyPr wrap="square" lIns="0" tIns="0" rIns="0" bIns="0" rtlCol="0" anchor="t"/>
+          <a:lstStyle/>
+          <a:p>
+            <a:pPr marL="342900" indent="-342900">
+              <a:spcAft>
+                <a:spcPts val="1100"/>
+              </a:spcAft>
+              <a:buSzPct val="100000"/>
+              <a:buChar char="•"/>
+            </a:pPr>
+            <a:r>
+              <a:rPr lang="en-US" sz="1250" dirty="0">
+                <a:solidFill>
+                  <a:srgbClr val="3A3F52"/>
+                </a:solidFill>
+                <a:latin typeface="Calibri" pitchFamily="34" charset="0"/>
+                <a:ea typeface="Calibri" pitchFamily="34" charset="-122"/>
+                <a:cs typeface="Calibri" pitchFamily="34" charset="-120"/>
+              </a:rPr>
+              <a:t>알람 임계값을 직접 판단 (HPA 50% · 재시작 감지)</a:t>
             </a:r>
             <a:endParaRPr lang="en-US" sz="1250" dirty="0"/>
           </a:p>
-        </p:txBody>
-      </p:sp>
-      <p:sp>
-        <p:nvSpPr>
-          <p:cNvPr id="14" name="Text 12"/>
-          <p:cNvSpPr/>
-          <p:nvPr/>
-        </p:nvSpPr>
-        <p:spPr>
-          <a:xfrm>
-            <a:off x="8321040" y="1783080"/>
-            <a:ext cx="3154680" cy="777240"/>
-          </a:xfrm>
-          <a:prstGeom prst="rect">
-            <a:avLst/>
-          </a:prstGeom>
-          <a:noFill/>
-          <a:ln/>
-        </p:spPr>
-        <p:txBody>
-          <a:bodyPr wrap="square" lIns="0" tIns="0" rIns="0" bIns="0" rtlCol="0" anchor="ctr"/>
-          <a:lstStyle/>
-          <a:p>
-            <a:pPr algn="ctr" indent="0" marL="0">
-              <a:buNone/>
-            </a:pPr>
-            <a:r>
-              <a:rPr lang="en-US" sz="4400" b="1" dirty="0">
-                <a:solidFill>
-                  <a:srgbClr val="FFFFFF"/>
-                </a:solidFill>
-                <a:latin typeface="Cambria" pitchFamily="34" charset="0"/>
-                <a:ea typeface="Cambria" pitchFamily="34" charset="-122"/>
-                <a:cs typeface="Cambria" pitchFamily="34" charset="-120"/>
-              </a:rPr>
-              <a:t>$0</a:t>
-            </a:r>
-            <a:endParaRPr lang="en-US" sz="4400" dirty="0"/>
-          </a:p>
-        </p:txBody>
-      </p:sp>
-      <p:sp>
-        <p:nvSpPr>
-          <p:cNvPr id="15" name="Text 13"/>
-          <p:cNvSpPr/>
-          <p:nvPr/>
-        </p:nvSpPr>
-        <p:spPr>
-          <a:xfrm>
-            <a:off x="8321040" y="2651760"/>
-            <a:ext cx="3154680" cy="320040"/>
-          </a:xfrm>
-          <a:prstGeom prst="rect">
-            <a:avLst/>
-          </a:prstGeom>
-          <a:noFill/>
-          <a:ln/>
-        </p:spPr>
-        <p:txBody>
-          <a:bodyPr wrap="square" lIns="0" tIns="0" rIns="0" bIns="0" rtlCol="0" anchor="ctr"/>
-          <a:lstStyle/>
-          <a:p>
-            <a:pPr algn="ctr" indent="0" marL="0">
-              <a:buNone/>
-            </a:pPr>
-            <a:r>
-              <a:rPr lang="en-US" sz="1200" dirty="0">
-                <a:solidFill>
-                  <a:srgbClr val="CADCFC"/>
-                </a:solidFill>
-                <a:latin typeface="Calibri" pitchFamily="34" charset="0"/>
-                <a:ea typeface="Calibri" pitchFamily="34" charset="-122"/>
-                <a:cs typeface="Calibri" pitchFamily="34" charset="-120"/>
-              </a:rPr>
-              <a:t>전액 크레딧 차감</a:t>
-            </a:r>
-            <a:endParaRPr lang="en-US" sz="1200" dirty="0"/>
-          </a:p>
-        </p:txBody>
-      </p:sp>
-      <p:sp>
-        <p:nvSpPr>
-          <p:cNvPr id="16" name="Text 14"/>
-          <p:cNvSpPr/>
-          <p:nvPr/>
-        </p:nvSpPr>
-        <p:spPr>
-          <a:xfrm>
-            <a:off x="548640" y="3291840"/>
-            <a:ext cx="11064240" cy="457200"/>
-          </a:xfrm>
-          <a:prstGeom prst="rect">
-            <a:avLst/>
-          </a:prstGeom>
-          <a:noFill/>
-          <a:ln/>
-        </p:spPr>
-        <p:txBody>
-          <a:bodyPr wrap="square" lIns="0" tIns="0" rIns="0" bIns="0" rtlCol="0" anchor="ctr"/>
-          <a:lstStyle/>
-          <a:p>
-            <a:pPr indent="0" marL="0">
-              <a:buNone/>
-            </a:pPr>
-            <a:r>
-              <a:rPr lang="en-US" sz="1450" b="1" dirty="0">
-                <a:solidFill>
-                  <a:srgbClr val="1E2761"/>
-                </a:solidFill>
-                <a:latin typeface="Calibri" pitchFamily="34" charset="0"/>
-                <a:ea typeface="Calibri" pitchFamily="34" charset="-122"/>
-                <a:cs typeface="Calibri" pitchFamily="34" charset="-120"/>
-              </a:rPr>
-              <a:t>Why?   </a:t>
-            </a:r>
-            <a:pPr indent="0" marL="0">
-              <a:buNone/>
-            </a:pPr>
-            <a:r>
-              <a:rPr lang="en-US" sz="1300" dirty="0">
+          <a:p>
+            <a:pPr marL="342900" indent="-342900">
+              <a:spcAft>
+                <a:spcPts val="1100"/>
+              </a:spcAft>
+              <a:buSzPct val="100000"/>
+              <a:buChar char="•"/>
+            </a:pPr>
+            <a:r>
+              <a:rPr lang="en-US" sz="1250" dirty="0">
                 <a:solidFill>
                   <a:srgbClr val="3A3F52"/>
                 </a:solidFill>
@@ -8572,74 +8793,20 @@
                 <a:ea typeface="Calibri" pitchFamily="34" charset="-122"/>
                 <a:cs typeface="Calibri" pitchFamily="34" charset="-120"/>
               </a:rPr>
-              <a:t>작업 단위로 apply / destroy 반복 — 필요한 시점에만 가동하고, state 밖 리소스(ALB·EBS)까지 전수검증해 “조용한 과금”을 차단</a:t>
-            </a:r>
-            <a:endParaRPr lang="en-US" sz="1450" dirty="0"/>
-          </a:p>
-        </p:txBody>
-      </p:sp>
-      <p:sp>
-        <p:nvSpPr>
-          <p:cNvPr id="17" name="Shape 15"/>
-          <p:cNvSpPr/>
-          <p:nvPr/>
-        </p:nvSpPr>
-        <p:spPr>
-          <a:xfrm>
-            <a:off x="548640" y="3886200"/>
-            <a:ext cx="3520440" cy="658368"/>
-          </a:xfrm>
-          <a:prstGeom prst="roundRect">
-            <a:avLst>
-              <a:gd name="adj" fmla="val 11111"/>
-            </a:avLst>
-          </a:prstGeom>
-          <a:solidFill>
-            <a:srgbClr val="F4F6FC"/>
-          </a:solidFill>
-          <a:ln/>
-        </p:spPr>
-      </p:sp>
-      <p:sp>
-        <p:nvSpPr>
-          <p:cNvPr id="18" name="Text 16"/>
-          <p:cNvSpPr/>
-          <p:nvPr/>
-        </p:nvSpPr>
-        <p:spPr>
-          <a:xfrm>
-            <a:off x="731520" y="3886200"/>
-            <a:ext cx="3200400" cy="658368"/>
-          </a:xfrm>
-          <a:prstGeom prst="rect">
-            <a:avLst/>
-          </a:prstGeom>
-          <a:noFill/>
-          <a:ln/>
-        </p:spPr>
-        <p:txBody>
-          <a:bodyPr wrap="square" lIns="0" tIns="0" rIns="0" bIns="0" rtlCol="0" anchor="ctr"/>
-          <a:lstStyle/>
-          <a:p>
-            <a:pPr indent="0" marL="0">
-              <a:buNone/>
-            </a:pPr>
-            <a:r>
-              <a:rPr lang="en-US" sz="1350" b="1" dirty="0">
-                <a:solidFill>
-                  <a:srgbClr val="1E2761"/>
-                </a:solidFill>
-                <a:latin typeface="Calibri" pitchFamily="34" charset="0"/>
-                <a:ea typeface="Calibri" pitchFamily="34" charset="-122"/>
-                <a:cs typeface="Calibri" pitchFamily="34" charset="-120"/>
-              </a:rPr>
-              <a:t>재현   </a:t>
-            </a:r>
-            <a:pPr indent="0" marL="0">
-              <a:buNone/>
-            </a:pPr>
-            <a:r>
-              <a:rPr lang="en-US" sz="1100" dirty="0">
+              <a:t>장애를 직접 만들어 경보 경로 검증</a:t>
+            </a:r>
+            <a:endParaRPr lang="en-US" sz="1250" dirty="0"/>
+          </a:p>
+          <a:p>
+            <a:pPr marL="342900" indent="-342900">
+              <a:spcAft>
+                <a:spcPts val="1100"/>
+              </a:spcAft>
+              <a:buSzPct val="100000"/>
+              <a:buChar char="•"/>
+            </a:pPr>
+            <a:r>
+              <a:rPr lang="en-US" sz="1250" dirty="0">
                 <a:solidFill>
                   <a:srgbClr val="3A3F52"/>
                 </a:solidFill>
@@ -8647,74 +8814,20 @@
                 <a:ea typeface="Calibri" pitchFamily="34" charset="-122"/>
                 <a:cs typeface="Calibri" pitchFamily="34" charset="-120"/>
               </a:rPr>
-              <a:t>apply + 9단계 루틴 · 20분 복원 · 5회 실증</a:t>
-            </a:r>
-            <a:endParaRPr lang="en-US" sz="1350" dirty="0"/>
-          </a:p>
-        </p:txBody>
-      </p:sp>
-      <p:sp>
-        <p:nvSpPr>
-          <p:cNvPr id="19" name="Shape 17"/>
-          <p:cNvSpPr/>
-          <p:nvPr/>
-        </p:nvSpPr>
-        <p:spPr>
-          <a:xfrm>
-            <a:off x="4343400" y="3886200"/>
-            <a:ext cx="3520440" cy="658368"/>
-          </a:xfrm>
-          <a:prstGeom prst="roundRect">
-            <a:avLst>
-              <a:gd name="adj" fmla="val 11111"/>
-            </a:avLst>
-          </a:prstGeom>
-          <a:solidFill>
-            <a:srgbClr val="F4F6FC"/>
-          </a:solidFill>
-          <a:ln/>
-        </p:spPr>
-      </p:sp>
-      <p:sp>
-        <p:nvSpPr>
-          <p:cNvPr id="20" name="Text 18"/>
-          <p:cNvSpPr/>
-          <p:nvPr/>
-        </p:nvSpPr>
-        <p:spPr>
-          <a:xfrm>
-            <a:off x="4526280" y="3886200"/>
-            <a:ext cx="3200400" cy="658368"/>
-          </a:xfrm>
-          <a:prstGeom prst="rect">
-            <a:avLst/>
-          </a:prstGeom>
-          <a:noFill/>
-          <a:ln/>
-        </p:spPr>
-        <p:txBody>
-          <a:bodyPr wrap="square" lIns="0" tIns="0" rIns="0" bIns="0" rtlCol="0" anchor="ctr"/>
-          <a:lstStyle/>
-          <a:p>
-            <a:pPr indent="0" marL="0">
-              <a:buNone/>
-            </a:pPr>
-            <a:r>
-              <a:rPr lang="en-US" sz="1350" b="1" dirty="0">
-                <a:solidFill>
-                  <a:srgbClr val="1E2761"/>
-                </a:solidFill>
-                <a:latin typeface="Calibri" pitchFamily="34" charset="0"/>
-                <a:ea typeface="Calibri" pitchFamily="34" charset="-122"/>
-                <a:cs typeface="Calibri" pitchFamily="34" charset="-120"/>
-              </a:rPr>
-              <a:t>검증   </a:t>
-            </a:r>
-            <a:pPr indent="0" marL="0">
-              <a:buNone/>
-            </a:pPr>
-            <a:r>
-              <a:rPr lang="en-US" sz="1100" dirty="0">
+              <a:t>재기동 9단계·종료 4단계 절차를 직접 작성</a:t>
+            </a:r>
+            <a:endParaRPr lang="en-US" sz="1250" dirty="0"/>
+          </a:p>
+          <a:p>
+            <a:pPr marL="342900" indent="-342900">
+              <a:spcAft>
+                <a:spcPts val="1100"/>
+              </a:spcAft>
+              <a:buSzPct val="100000"/>
+              <a:buChar char="•"/>
+            </a:pPr>
+            <a:r>
+              <a:rPr lang="en-US" sz="1250" dirty="0">
                 <a:solidFill>
                   <a:srgbClr val="3A3F52"/>
                 </a:solidFill>
@@ -8722,184 +8835,9 @@
                 <a:ea typeface="Calibri" pitchFamily="34" charset="-122"/>
                 <a:cs typeface="Calibri" pitchFamily="34" charset="-120"/>
               </a:rPr>
-              <a:t>E2E · GitOps · 알람 · HPA 전 항목 재통과</a:t>
-            </a:r>
-            <a:endParaRPr lang="en-US" sz="1350" dirty="0"/>
-          </a:p>
-        </p:txBody>
-      </p:sp>
-      <p:sp>
-        <p:nvSpPr>
-          <p:cNvPr id="21" name="Shape 19"/>
-          <p:cNvSpPr/>
-          <p:nvPr/>
-        </p:nvSpPr>
-        <p:spPr>
-          <a:xfrm>
-            <a:off x="8138160" y="3886200"/>
-            <a:ext cx="3520440" cy="658368"/>
-          </a:xfrm>
-          <a:prstGeom prst="roundRect">
-            <a:avLst>
-              <a:gd name="adj" fmla="val 11111"/>
-            </a:avLst>
-          </a:prstGeom>
-          <a:solidFill>
-            <a:srgbClr val="F4F6FC"/>
-          </a:solidFill>
-          <a:ln/>
-        </p:spPr>
-      </p:sp>
-      <p:sp>
-        <p:nvSpPr>
-          <p:cNvPr id="22" name="Text 20"/>
-          <p:cNvSpPr/>
-          <p:nvPr/>
-        </p:nvSpPr>
-        <p:spPr>
-          <a:xfrm>
-            <a:off x="8321040" y="3886200"/>
-            <a:ext cx="3200400" cy="658368"/>
-          </a:xfrm>
-          <a:prstGeom prst="rect">
-            <a:avLst/>
-          </a:prstGeom>
-          <a:noFill/>
-          <a:ln/>
-        </p:spPr>
-        <p:txBody>
-          <a:bodyPr wrap="square" lIns="0" tIns="0" rIns="0" bIns="0" rtlCol="0" anchor="ctr"/>
-          <a:lstStyle/>
-          <a:p>
-            <a:pPr indent="0" marL="0">
-              <a:buNone/>
-            </a:pPr>
-            <a:r>
-              <a:rPr lang="en-US" sz="1350" b="1" dirty="0">
-                <a:solidFill>
-                  <a:srgbClr val="1E2761"/>
-                </a:solidFill>
-                <a:latin typeface="Calibri" pitchFamily="34" charset="0"/>
-                <a:ea typeface="Calibri" pitchFamily="34" charset="-122"/>
-                <a:cs typeface="Calibri" pitchFamily="34" charset="-120"/>
-              </a:rPr>
-              <a:t>회수   </a:t>
-            </a:r>
-            <a:pPr indent="0" marL="0">
-              <a:buNone/>
-            </a:pPr>
-            <a:r>
-              <a:rPr lang="en-US" sz="1100" dirty="0">
-                <a:solidFill>
-                  <a:srgbClr val="3A3F52"/>
-                </a:solidFill>
-                <a:latin typeface="Calibri" pitchFamily="34" charset="0"/>
-                <a:ea typeface="Calibri" pitchFamily="34" charset="-122"/>
-                <a:cs typeface="Calibri" pitchFamily="34" charset="-120"/>
-              </a:rPr>
-              <a:t>destroy 78개 · 13개 항목 전수검증 · 잔여물 0</a:t>
-            </a:r>
-            <a:endParaRPr lang="en-US" sz="1350" dirty="0"/>
-          </a:p>
-        </p:txBody>
-      </p:sp>
-      <p:sp>
-        <p:nvSpPr>
-          <p:cNvPr id="23" name="Shape 21"/>
-          <p:cNvSpPr/>
-          <p:nvPr/>
-        </p:nvSpPr>
-        <p:spPr>
-          <a:xfrm>
-            <a:off x="548640" y="4800600"/>
-            <a:ext cx="11064240" cy="1371600"/>
-          </a:xfrm>
-          <a:prstGeom prst="roundRect">
-            <a:avLst>
-              <a:gd name="adj" fmla="val 6000"/>
-            </a:avLst>
-          </a:prstGeom>
-          <a:solidFill>
-            <a:srgbClr val="1E2761"/>
-          </a:solidFill>
-          <a:ln/>
-        </p:spPr>
-      </p:sp>
-      <p:sp>
-        <p:nvSpPr>
-          <p:cNvPr id="24" name="Text 22"/>
-          <p:cNvSpPr/>
-          <p:nvPr/>
-        </p:nvSpPr>
-        <p:spPr>
-          <a:xfrm>
-            <a:off x="822960" y="4800600"/>
-            <a:ext cx="10515600" cy="1371600"/>
-          </a:xfrm>
-          <a:prstGeom prst="rect">
-            <a:avLst/>
-          </a:prstGeom>
-          <a:noFill/>
-          <a:ln/>
-        </p:spPr>
-        <p:txBody>
-          <a:bodyPr wrap="square" lIns="0" tIns="0" rIns="0" bIns="0" rtlCol="0" anchor="ctr"/>
-          <a:lstStyle/>
-          <a:p>
-            <a:pPr algn="ctr" indent="0" marL="0">
-              <a:buNone/>
-            </a:pPr>
-            <a:r>
-              <a:rPr lang="en-US" sz="2100" b="1" i="1" dirty="0">
-                <a:solidFill>
-                  <a:srgbClr val="FFFFFF"/>
-                </a:solidFill>
-                <a:latin typeface="Cambria" pitchFamily="34" charset="0"/>
-                <a:ea typeface="Cambria" pitchFamily="34" charset="-122"/>
-                <a:cs typeface="Cambria" pitchFamily="34" charset="-120"/>
-              </a:rPr>
-              <a:t>“지금 이 순간 AWS 과금: $0 — 그리고 언제든 20분이면 되살릴 수 있습니다”</a:t>
-            </a:r>
-            <a:endParaRPr lang="en-US" sz="2100" dirty="0"/>
-          </a:p>
-        </p:txBody>
-      </p:sp>
-      <p:sp>
-        <p:nvSpPr>
-          <p:cNvPr id="25" name="Text 23"/>
-          <p:cNvSpPr/>
-          <p:nvPr/>
-        </p:nvSpPr>
-        <p:spPr>
-          <a:xfrm>
-            <a:off x="548640" y="6355080"/>
-            <a:ext cx="9875520" cy="365760"/>
-          </a:xfrm>
-          <a:prstGeom prst="rect">
-            <a:avLst/>
-          </a:prstGeom>
-          <a:noFill/>
-          <a:ln/>
-        </p:spPr>
-        <p:txBody>
-          <a:bodyPr wrap="square" lIns="0" tIns="0" rIns="0" bIns="0" rtlCol="0" anchor="ctr"/>
-          <a:lstStyle/>
-          <a:p>
-            <a:pPr algn="ctr" indent="0" marL="0">
-              <a:buNone/>
-            </a:pPr>
-            <a:r>
-              <a:rPr lang="en-US" sz="1150" i="1" dirty="0">
-                <a:solidFill>
-                  <a:srgbClr val="6B7089"/>
-                </a:solidFill>
-                <a:latin typeface="Calibri" pitchFamily="34" charset="0"/>
-                <a:ea typeface="Calibri" pitchFamily="34" charset="-122"/>
-                <a:cs typeface="Calibri" pitchFamily="34" charset="-120"/>
-              </a:rPr>
-              <a:t>실사용액은 7월 확정 청구서 기준 — 8월분도 전액 크레딧 차감 예정 (청구서 확정 시 갱신)</a:t>
-            </a:r>
-            <a:endParaRPr lang="en-US" sz="1150" dirty="0"/>
+              <a:t>표준화를 파이프라인 자동화로 확장 (CI→ECR→ArgoCD)</a:t>
+            </a:r>
+            <a:endParaRPr lang="en-US" sz="1250" dirty="0"/>
           </a:p>
         </p:txBody>
       </p:sp>
@@ -8968,7 +8906,7 @@
                 <a:ea typeface="Cambria" pitchFamily="34" charset="-122"/>
                 <a:cs typeface="Cambria" pitchFamily="34" charset="-120"/>
               </a:rPr>
-              <a:t>10. 마무리 — 배운 점과 다음 단계</a:t>
+              <a:t>09. 마무리 - 배운 점과 다음 단계</a:t>
             </a:r>
             <a:endParaRPr lang="en-US" sz="2800" dirty="0"/>
           </a:p>
@@ -9007,7 +8945,7 @@
                 <a:ea typeface="Calibri" pitchFamily="34" charset="-122"/>
                 <a:cs typeface="Calibri" pitchFamily="34" charset="-120"/>
               </a:rPr>
-              <a:t>PAGE 17</a:t>
+              <a:t>PAGE 18</a:t>
             </a:r>
             <a:endParaRPr lang="en-US" sz="1000" dirty="0"/>
           </a:p>
@@ -9089,7 +9027,7 @@
                 <a:ea typeface="Calibri" pitchFamily="34" charset="-122"/>
                 <a:cs typeface="Calibri" pitchFamily="34" charset="-120"/>
               </a:rPr>
-              <a:t>완료의 기준은 계층마다 다르다 — rollout 성공 ≠ 로드밸런서 무중단, HPA 증설 ≠ 노드 여유</a:t>
+              <a:t>완료 기준은 계층마다 다르다: rollout 성공 ≠ LB 무중단, HPA 증설 ≠ 노드 여유</a:t>
             </a:r>
             <a:endParaRPr lang="en-US" sz="1400" dirty="0"/>
           </a:p>
@@ -9110,7 +9048,7 @@
                 <a:ea typeface="Calibri" pitchFamily="34" charset="-122"/>
                 <a:cs typeface="Calibri" pitchFamily="34" charset="-120"/>
               </a:rPr>
-              <a:t>실패의 원인은 기록되는 곳이 따로 있다 — ASG 로그 · CloudTrail · 파드 Events</a:t>
+              <a:t>실패 원인이 적히는 곳은 따로 있다: ASG 로그, CloudTrail, 파드 Events</a:t>
             </a:r>
             <a:endParaRPr lang="en-US" sz="1400" dirty="0"/>
           </a:p>
@@ -9128,7 +9066,7 @@
                 <a:ea typeface="Calibri" pitchFamily="34" charset="-122"/>
                 <a:cs typeface="Calibri" pitchFamily="34" charset="-120"/>
               </a:rPr>
-              <a:t>문서가 곧 재현성이다 — ADR 3건 · 트러블슈팅 7건 · 운영 루틴 (5회 재현으로 증명)</a:t>
+              <a:t>문서가 곧 재현성이다: ADR 3건, 트러블슈팅 7건, 운영 루틴으로 5회 재현</a:t>
             </a:r>
             <a:endParaRPr lang="en-US" sz="1400" dirty="0"/>
           </a:p>
@@ -9156,6 +9094,10 @@
             <a:prstDash val="solid"/>
           </a:ln>
         </p:spPr>
+        <p:txBody>
+          <a:bodyPr/>
+          <a:p/>
+        </p:txBody>
       </p:sp>
       <p:sp>
         <p:nvSpPr>
@@ -9233,7 +9175,7 @@
                 <a:ea typeface="Calibri" pitchFamily="34" charset="-122"/>
                 <a:cs typeface="Calibri" pitchFamily="34" charset="-120"/>
               </a:rPr>
-              <a:t>Cluster Autoscaler — Pending 실증을 근거로 노드 자동 확장</a:t>
+              <a:t>Cluster Autoscaler: Pending 관찰을 근거로 노드 자동 확장</a:t>
             </a:r>
             <a:endParaRPr lang="en-US" sz="1400" dirty="0"/>
           </a:p>
@@ -9254,7 +9196,7 @@
                 <a:ea typeface="Calibri" pitchFamily="34" charset="-122"/>
                 <a:cs typeface="Calibri" pitchFamily="34" charset="-120"/>
               </a:rPr>
-              <a:t>Pod Readiness Gate — 롤링 배포 무중단 보강</a:t>
+              <a:t>Pod Readiness Gate: 롤링 배포 무중단 보강</a:t>
             </a:r>
             <a:endParaRPr lang="en-US" sz="1400" dirty="0"/>
           </a:p>
@@ -9275,7 +9217,7 @@
                 <a:ea typeface="Calibri" pitchFamily="34" charset="-122"/>
                 <a:cs typeface="Calibri" pitchFamily="34" charset="-120"/>
               </a:rPr>
-              <a:t>AWS Budgets 예산 알람 · 알람 라우팅 튜닝</a:t>
+              <a:t>알람 라우팅 튜닝 (InfoInhibitor 등)</a:t>
             </a:r>
             <a:endParaRPr lang="en-US" sz="1400" dirty="0"/>
           </a:p>
@@ -9350,6 +9292,10 @@
           </a:solidFill>
           <a:ln/>
         </p:spPr>
+        <p:txBody>
+          <a:bodyPr/>
+          <a:p/>
+        </p:txBody>
       </p:sp>
       <p:sp>
         <p:nvSpPr>
@@ -9370,6 +9316,10 @@
           </a:solidFill>
           <a:ln/>
         </p:spPr>
+        <p:txBody>
+          <a:bodyPr/>
+          <a:p/>
+        </p:txBody>
       </p:sp>
       <p:sp>
         <p:nvSpPr>
@@ -9482,7 +9432,7 @@
                 <a:ea typeface="Calibri" pitchFamily="34" charset="-122"/>
                 <a:cs typeface="Calibri" pitchFamily="34" charset="-120"/>
               </a:rPr>
-              <a:t>한 줄의 코드부터 회수까지 — 전 과정을 직접 검증했습니다</a:t>
+              <a:t>코드 한 줄부터 회수까지, 전 과정을 직접 검증했습니다</a:t>
             </a:r>
             <a:endParaRPr lang="en-US" sz="1500" dirty="0"/>
           </a:p>
@@ -9584,7 +9534,7 @@
                 <a:ea typeface="Calibri" pitchFamily="34" charset="-122"/>
                 <a:cs typeface="Calibri" pitchFamily="34" charset="-120"/>
               </a:rPr>
-              <a:t>QR — GitHub repo</a:t>
+              <a:t>QR: GitHub repo</a:t>
             </a:r>
             <a:endParaRPr lang="en-US" sz="1050" dirty="0"/>
           </a:p>
@@ -9616,6 +9566,10 @@
             <a:prstDash val="solid"/>
           </a:ln>
         </p:spPr>
+        <p:txBody>
+          <a:bodyPr/>
+          <a:p/>
+        </p:txBody>
       </p:sp>
       <p:sp>
         <p:nvSpPr>
@@ -9749,6 +9703,10 @@
           </a:solidFill>
           <a:ln/>
         </p:spPr>
+        <p:txBody>
+          <a:bodyPr/>
+          <a:p/>
+        </p:txBody>
       </p:sp>
       <p:sp>
         <p:nvSpPr>
@@ -9967,6 +9925,10 @@
             <a:prstDash val="solid"/>
           </a:ln>
         </p:spPr>
+        <p:txBody>
+          <a:bodyPr/>
+          <a:p/>
+        </p:txBody>
       </p:sp>
       <p:sp>
         <p:nvSpPr>
@@ -10068,6 +10030,10 @@
             <a:prstDash val="solid"/>
           </a:ln>
         </p:spPr>
+        <p:txBody>
+          <a:bodyPr/>
+          <a:p/>
+        </p:txBody>
       </p:sp>
       <p:sp>
         <p:nvSpPr>
@@ -10169,6 +10135,10 @@
             <a:prstDash val="solid"/>
           </a:ln>
         </p:spPr>
+        <p:txBody>
+          <a:bodyPr/>
+          <a:p/>
+        </p:txBody>
       </p:sp>
       <p:sp>
         <p:nvSpPr>
@@ -10270,6 +10240,10 @@
             <a:prstDash val="solid"/>
           </a:ln>
         </p:spPr>
+        <p:txBody>
+          <a:bodyPr/>
+          <a:p/>
+        </p:txBody>
       </p:sp>
       <p:sp>
         <p:nvSpPr>
@@ -10371,6 +10345,10 @@
             <a:prstDash val="solid"/>
           </a:ln>
         </p:spPr>
+        <p:txBody>
+          <a:bodyPr/>
+          <a:p/>
+        </p:txBody>
       </p:sp>
       <p:sp>
         <p:nvSpPr>
@@ -10472,6 +10450,10 @@
             <a:prstDash val="solid"/>
           </a:ln>
         </p:spPr>
+        <p:txBody>
+          <a:bodyPr/>
+          <a:p/>
+        </p:txBody>
       </p:sp>
       <p:sp>
         <p:nvSpPr>
@@ -10573,6 +10555,10 @@
             <a:prstDash val="solid"/>
           </a:ln>
         </p:spPr>
+        <p:txBody>
+          <a:bodyPr/>
+          <a:p/>
+        </p:txBody>
       </p:sp>
       <p:sp>
         <p:nvSpPr>
@@ -10674,10 +10660,14 @@
             <a:prstDash val="solid"/>
           </a:ln>
         </p:spPr>
-      </p:sp>
-      <p:sp>
-        <p:nvSpPr>
-          <p:cNvPr id="30" name="Text 28"/>
+        <p:txBody>
+          <a:bodyPr/>
+          <a:p/>
+        </p:txBody>
+      </p:sp>
+      <p:sp>
+        <p:nvSpPr>
+          <p:cNvPr id="33" name="Text 31"/>
           <p:cNvSpPr/>
           <p:nvPr/>
         </p:nvSpPr>
@@ -10716,7 +10706,7 @@
       </p:sp>
       <p:sp>
         <p:nvSpPr>
-          <p:cNvPr id="31" name="Text 29"/>
+          <p:cNvPr id="34" name="Text 32"/>
           <p:cNvSpPr/>
           <p:nvPr/>
         </p:nvSpPr>
@@ -10747,721 +10737,9 @@
                 <a:ea typeface="Calibri" pitchFamily="34" charset="-122"/>
                 <a:cs typeface="Calibri" pitchFamily="34" charset="-120"/>
               </a:rPr>
-              <a:t>IaC 기반 비용 통제</a:t>
+              <a:t>마무리</a:t>
             </a:r>
             <a:endParaRPr lang="en-US" sz="1550" dirty="0"/>
-          </a:p>
-        </p:txBody>
-      </p:sp>
-      <p:sp>
-        <p:nvSpPr>
-          <p:cNvPr id="32" name="Shape 30"/>
-          <p:cNvSpPr/>
-          <p:nvPr/>
-        </p:nvSpPr>
-        <p:spPr>
-          <a:xfrm>
-            <a:off x="5394960" y="5696712"/>
-            <a:ext cx="6035040" cy="0"/>
-          </a:xfrm>
-          <a:prstGeom prst="line">
-            <a:avLst/>
-          </a:prstGeom>
-          <a:noFill/>
-          <a:ln w="12700">
-            <a:solidFill>
-              <a:srgbClr val="E1E6F5"/>
-            </a:solidFill>
-            <a:prstDash val="solid"/>
-          </a:ln>
-        </p:spPr>
-      </p:sp>
-      <p:sp>
-        <p:nvSpPr>
-          <p:cNvPr id="33" name="Text 31"/>
-          <p:cNvSpPr/>
-          <p:nvPr/>
-        </p:nvSpPr>
-        <p:spPr>
-          <a:xfrm>
-            <a:off x="5394960" y="5788152"/>
-            <a:ext cx="548640" cy="411480"/>
-          </a:xfrm>
-          <a:prstGeom prst="rect">
-            <a:avLst/>
-          </a:prstGeom>
-          <a:noFill/>
-          <a:ln/>
-        </p:spPr>
-        <p:txBody>
-          <a:bodyPr wrap="square" lIns="0" tIns="0" rIns="0" bIns="0" rtlCol="0" anchor="ctr"/>
-          <a:lstStyle/>
-          <a:p>
-            <a:pPr indent="0" marL="0">
-              <a:buNone/>
-            </a:pPr>
-            <a:r>
-              <a:rPr lang="en-US" sz="1600" b="1" dirty="0">
-                <a:solidFill>
-                  <a:srgbClr val="5B79D6"/>
-                </a:solidFill>
-                <a:latin typeface="Cambria" pitchFamily="34" charset="0"/>
-                <a:ea typeface="Cambria" pitchFamily="34" charset="-122"/>
-                <a:cs typeface="Cambria" pitchFamily="34" charset="-120"/>
-              </a:rPr>
-              <a:t>10</a:t>
-            </a:r>
-            <a:endParaRPr lang="en-US" sz="1600" dirty="0"/>
-          </a:p>
-        </p:txBody>
-      </p:sp>
-      <p:sp>
-        <p:nvSpPr>
-          <p:cNvPr id="34" name="Text 32"/>
-          <p:cNvSpPr/>
-          <p:nvPr/>
-        </p:nvSpPr>
-        <p:spPr>
-          <a:xfrm>
-            <a:off x="6035040" y="5788152"/>
-            <a:ext cx="5394960" cy="411480"/>
-          </a:xfrm>
-          <a:prstGeom prst="rect">
-            <a:avLst/>
-          </a:prstGeom>
-          <a:noFill/>
-          <a:ln/>
-        </p:spPr>
-        <p:txBody>
-          <a:bodyPr wrap="square" lIns="0" tIns="0" rIns="0" bIns="0" rtlCol="0" anchor="ctr"/>
-          <a:lstStyle/>
-          <a:p>
-            <a:pPr indent="0" marL="0">
-              <a:buNone/>
-            </a:pPr>
-            <a:r>
-              <a:rPr lang="en-US" sz="1550" dirty="0">
-                <a:solidFill>
-                  <a:srgbClr val="3A3F52"/>
-                </a:solidFill>
-                <a:latin typeface="Calibri" pitchFamily="34" charset="0"/>
-                <a:ea typeface="Calibri" pitchFamily="34" charset="-122"/>
-                <a:cs typeface="Calibri" pitchFamily="34" charset="-120"/>
-              </a:rPr>
-              <a:t>마무리</a:t>
-            </a:r>
-            <a:endParaRPr lang="en-US" sz="1550" dirty="0"/>
-          </a:p>
-        </p:txBody>
-      </p:sp>
-    </p:spTree>
-  </p:cSld>
-  <p:clrMapOvr>
-    <a:masterClrMapping/>
-  </p:clrMapOvr>
-</p:sld>
-</file>
-
-<file path=ppt/slides/slide20.xml><?xml version="1.0" encoding="utf-8"?>
-<p:sld xmlns:a="http://schemas.openxmlformats.org/drawingml/2006/main" xmlns:r="http://schemas.openxmlformats.org/officeDocument/2006/relationships" xmlns:p="http://schemas.openxmlformats.org/presentationml/2006/main">
-  <p:cSld name="Slide 3">
-    <p:bg>
-      <p:bgPr>
-        <a:solidFill>
-          <a:srgbClr val="FFFFFF"/>
-        </a:solidFill>
-      </p:bgPr>
-    </p:bg>
-    <p:spTree>
-      <p:nvGrpSpPr>
-        <p:cNvPr id="1" name=""/>
-        <p:cNvGrpSpPr/>
-        <p:nvPr/>
-      </p:nvGrpSpPr>
-      <p:grpSpPr>
-        <a:xfrm>
-          <a:off x="0" y="0"/>
-          <a:ext cx="0" cy="0"/>
-          <a:chOff x="0" y="0"/>
-          <a:chExt cx="0" cy="0"/>
-        </a:xfrm>
-      </p:grpSpPr>
-      <p:sp>
-        <p:nvSpPr>
-          <p:cNvPr id="2" name="Text 0"/>
-          <p:cNvSpPr/>
-          <p:nvPr/>
-        </p:nvSpPr>
-        <p:spPr>
-          <a:xfrm>
-            <a:off x="548640" y="365760"/>
-            <a:ext cx="11064240" cy="685800"/>
-          </a:xfrm>
-          <a:prstGeom prst="rect">
-            <a:avLst/>
-          </a:prstGeom>
-          <a:noFill/>
-          <a:ln/>
-        </p:spPr>
-        <p:txBody>
-          <a:bodyPr wrap="square" lIns="0" tIns="0" rIns="0" bIns="0" rtlCol="0" anchor="ctr"/>
-          <a:lstStyle/>
-          <a:p>
-            <a:pPr indent="0" marL="0">
-              <a:buNone/>
-            </a:pPr>
-            <a:r>
-              <a:rPr lang="en-US" sz="2800" b="1" dirty="0">
-                <a:solidFill>
-                  <a:srgbClr val="1E2761"/>
-                </a:solidFill>
-                <a:latin typeface="Cambria" pitchFamily="34" charset="0"/>
-                <a:ea typeface="Cambria" pitchFamily="34" charset="-122"/>
-                <a:cs typeface="Cambria" pitchFamily="34" charset="-120"/>
-              </a:rPr>
-              <a:t>10. 마무리 — 운영 경험은 설계로 어떻게 쓰였나?</a:t>
-            </a:r>
-            <a:endParaRPr lang="en-US" sz="2800" dirty="0"/>
-          </a:p>
-        </p:txBody>
-      </p:sp>
-      <p:sp>
-        <p:nvSpPr>
-          <p:cNvPr id="3" name="Text 1"/>
-          <p:cNvSpPr/>
-          <p:nvPr/>
-        </p:nvSpPr>
-        <p:spPr>
-          <a:xfrm>
-            <a:off x="10607040" y="6446520"/>
-            <a:ext cx="1371600" cy="274320"/>
-          </a:xfrm>
-          <a:prstGeom prst="rect">
-            <a:avLst/>
-          </a:prstGeom>
-          <a:noFill/>
-          <a:ln/>
-        </p:spPr>
-        <p:txBody>
-          <a:bodyPr wrap="square" lIns="0" tIns="0" rIns="0" bIns="0" rtlCol="0" anchor="ctr"/>
-          <a:lstStyle/>
-          <a:p>
-            <a:pPr algn="r" indent="0" marL="0">
-              <a:buNone/>
-            </a:pPr>
-            <a:r>
-              <a:rPr lang="en-US" sz="1000" b="1" dirty="0">
-                <a:solidFill>
-                  <a:srgbClr val="6B7089"/>
-                </a:solidFill>
-                <a:latin typeface="Calibri" pitchFamily="34" charset="0"/>
-                <a:ea typeface="Calibri" pitchFamily="34" charset="-122"/>
-                <a:cs typeface="Calibri" pitchFamily="34" charset="-120"/>
-              </a:rPr>
-              <a:t>PAGE 16</a:t>
-            </a:r>
-            <a:endParaRPr lang="en-US" sz="1000" dirty="0"/>
-          </a:p>
-        </p:txBody>
-      </p:sp>
-      <p:sp>
-        <p:nvSpPr>
-          <p:cNvPr id="4" name="Shape 2"/>
-          <p:cNvSpPr/>
-          <p:nvPr/>
-        </p:nvSpPr>
-        <p:spPr>
-          <a:xfrm>
-            <a:off x="548640" y="1143000"/>
-            <a:ext cx="11064240" cy="777240"/>
-          </a:xfrm>
-          <a:prstGeom prst="roundRect">
-            <a:avLst>
-              <a:gd name="adj" fmla="val 10588"/>
-            </a:avLst>
-          </a:prstGeom>
-          <a:solidFill>
-            <a:srgbClr val="F4F6FC"/>
-          </a:solidFill>
-          <a:ln/>
-        </p:spPr>
-      </p:sp>
-      <p:sp>
-        <p:nvSpPr>
-          <p:cNvPr id="5" name="Text 3"/>
-          <p:cNvSpPr/>
-          <p:nvPr/>
-        </p:nvSpPr>
-        <p:spPr>
-          <a:xfrm>
-            <a:off x="868680" y="1143000"/>
-            <a:ext cx="10424160" cy="777240"/>
-          </a:xfrm>
-          <a:prstGeom prst="rect">
-            <a:avLst/>
-          </a:prstGeom>
-          <a:noFill/>
-          <a:ln/>
-        </p:spPr>
-        <p:txBody>
-          <a:bodyPr wrap="square" lIns="0" tIns="0" rIns="0" bIns="0" rtlCol="0" anchor="ctr"/>
-          <a:lstStyle/>
-          <a:p>
-            <a:pPr indent="0" marL="0">
-              <a:buNone/>
-            </a:pPr>
-            <a:r>
-              <a:rPr lang="en-US" sz="1600" b="1" dirty="0">
-                <a:solidFill>
-                  <a:srgbClr val="3556B8"/>
-                </a:solidFill>
-                <a:latin typeface="Calibri" pitchFamily="34" charset="0"/>
-                <a:ea typeface="Calibri" pitchFamily="34" charset="-122"/>
-                <a:cs typeface="Calibri" pitchFamily="34" charset="-120"/>
-              </a:rPr>
-              <a:t>A.  </a:t>
-            </a:r>
-            <a:pPr indent="0" marL="0">
-              <a:buNone/>
-            </a:pPr>
-            <a:r>
-              <a:rPr lang="en-US" sz="1500" b="1" dirty="0">
-                <a:solidFill>
-                  <a:srgbClr val="1E2761"/>
-                </a:solidFill>
-                <a:latin typeface="Calibri" pitchFamily="34" charset="0"/>
-                <a:ea typeface="Calibri" pitchFamily="34" charset="-122"/>
-                <a:cs typeface="Calibri" pitchFamily="34" charset="-120"/>
-              </a:rPr>
-              <a:t>고객의 클라우드를 관제·운영하며 세워온 판단 기준이, 이 프로젝트의 AWS 설계 근거가 되었습니다</a:t>
-            </a:r>
-            <a:endParaRPr lang="en-US" sz="1600" dirty="0"/>
-          </a:p>
-        </p:txBody>
-      </p:sp>
-      <p:sp>
-        <p:nvSpPr>
-          <p:cNvPr id="6" name="Shape 4"/>
-          <p:cNvSpPr/>
-          <p:nvPr/>
-        </p:nvSpPr>
-        <p:spPr>
-          <a:xfrm>
-            <a:off x="548640" y="2194560"/>
-            <a:ext cx="5394960" cy="3977640"/>
-          </a:xfrm>
-          <a:prstGeom prst="roundRect">
-            <a:avLst>
-              <a:gd name="adj" fmla="val 2069"/>
-            </a:avLst>
-          </a:prstGeom>
-          <a:solidFill>
-            <a:srgbClr val="F4F6FC"/>
-          </a:solidFill>
-          <a:ln/>
-          <a:effectLst>
-            <a:outerShdw sx="100000" sy="100000" kx="0" ky="0" algn="bl" rotWithShape="0" blurRad="76200" dist="25400" dir="5400000">
-              <a:srgbClr val="9AA3C0">
-                <a:alpha val="30000"/>
-              </a:srgbClr>
-            </a:outerShdw>
-          </a:effectLst>
-        </p:spPr>
-      </p:sp>
-      <p:sp>
-        <p:nvSpPr>
-          <p:cNvPr id="7" name="Text 5"/>
-          <p:cNvSpPr/>
-          <p:nvPr/>
-        </p:nvSpPr>
-        <p:spPr>
-          <a:xfrm>
-            <a:off x="868680" y="2423160"/>
-            <a:ext cx="4754880" cy="411480"/>
-          </a:xfrm>
-          <a:prstGeom prst="rect">
-            <a:avLst/>
-          </a:prstGeom>
-          <a:noFill/>
-          <a:ln/>
-        </p:spPr>
-        <p:txBody>
-          <a:bodyPr wrap="square" lIns="0" tIns="0" rIns="0" bIns="0" rtlCol="0" anchor="ctr"/>
-          <a:lstStyle/>
-          <a:p>
-            <a:pPr indent="0" marL="0">
-              <a:buNone/>
-            </a:pPr>
-            <a:r>
-              <a:rPr lang="en-US" sz="1700" b="1" dirty="0">
-                <a:solidFill>
-                  <a:srgbClr val="1E2761"/>
-                </a:solidFill>
-                <a:latin typeface="Cambria" pitchFamily="34" charset="0"/>
-                <a:ea typeface="Cambria" pitchFamily="34" charset="-122"/>
-                <a:cs typeface="Cambria" pitchFamily="34" charset="-120"/>
-              </a:rPr>
-              <a:t>기존 운영 관점 (Before)</a:t>
-            </a:r>
-            <a:endParaRPr lang="en-US" sz="1700" dirty="0"/>
-          </a:p>
-        </p:txBody>
-      </p:sp>
-      <p:sp>
-        <p:nvSpPr>
-          <p:cNvPr id="8" name="Text 6"/>
-          <p:cNvSpPr/>
-          <p:nvPr/>
-        </p:nvSpPr>
-        <p:spPr>
-          <a:xfrm>
-            <a:off x="868680" y="2852928"/>
-            <a:ext cx="4754880" cy="320040"/>
-          </a:xfrm>
-          <a:prstGeom prst="rect">
-            <a:avLst/>
-          </a:prstGeom>
-          <a:noFill/>
-          <a:ln/>
-        </p:spPr>
-        <p:txBody>
-          <a:bodyPr wrap="square" lIns="0" tIns="0" rIns="0" bIns="0" rtlCol="0" anchor="ctr"/>
-          <a:lstStyle/>
-          <a:p>
-            <a:pPr indent="0" marL="0">
-              <a:buNone/>
-            </a:pPr>
-            <a:r>
-              <a:rPr lang="en-US" sz="1150" b="1" dirty="0">
-                <a:solidFill>
-                  <a:srgbClr val="5B79D6"/>
-                </a:solidFill>
-                <a:latin typeface="Calibri" pitchFamily="34" charset="0"/>
-                <a:ea typeface="Calibri" pitchFamily="34" charset="-122"/>
-                <a:cs typeface="Calibri" pitchFamily="34" charset="-120"/>
-              </a:rPr>
-              <a:t>ZENIUS 관제 · KT/NHN/Naver Cloud 운영</a:t>
-            </a:r>
-            <a:endParaRPr lang="en-US" sz="1150" dirty="0"/>
-          </a:p>
-        </p:txBody>
-      </p:sp>
-      <p:sp>
-        <p:nvSpPr>
-          <p:cNvPr id="9" name="Text 7"/>
-          <p:cNvSpPr/>
-          <p:nvPr/>
-        </p:nvSpPr>
-        <p:spPr>
-          <a:xfrm>
-            <a:off x="868680" y="3337560"/>
-            <a:ext cx="4800600" cy="2651760"/>
-          </a:xfrm>
-          <a:prstGeom prst="rect">
-            <a:avLst/>
-          </a:prstGeom>
-          <a:noFill/>
-          <a:ln/>
-        </p:spPr>
-        <p:txBody>
-          <a:bodyPr wrap="square" lIns="0" tIns="0" rIns="0" bIns="0" rtlCol="0" anchor="t"/>
-          <a:lstStyle/>
-          <a:p>
-            <a:pPr marL="342900" indent="-342900">
-              <a:spcAft>
-                <a:spcPts val="1100"/>
-              </a:spcAft>
-              <a:buSzPct val="100000"/>
-              <a:buChar char="•"/>
-            </a:pPr>
-            <a:r>
-              <a:rPr lang="en-US" sz="1250" dirty="0">
-                <a:solidFill>
-                  <a:srgbClr val="3A3F52"/>
-                </a:solidFill>
-                <a:latin typeface="Calibri" pitchFamily="34" charset="0"/>
-                <a:ea typeface="Calibri" pitchFamily="34" charset="-122"/>
-                <a:cs typeface="Calibri" pitchFamily="34" charset="-120"/>
-              </a:rPr>
-              <a:t>타인이 정의한 임계값과 경보에 대응</a:t>
-            </a:r>
-            <a:endParaRPr lang="en-US" sz="1250" dirty="0"/>
-          </a:p>
-          <a:p>
-            <a:pPr marL="342900" indent="-342900">
-              <a:spcAft>
-                <a:spcPts val="1100"/>
-              </a:spcAft>
-              <a:buSzPct val="100000"/>
-              <a:buChar char="•"/>
-            </a:pPr>
-            <a:r>
-              <a:rPr lang="en-US" sz="1250" dirty="0">
-                <a:solidFill>
-                  <a:srgbClr val="3A3F52"/>
-                </a:solidFill>
-                <a:latin typeface="Calibri" pitchFamily="34" charset="0"/>
-                <a:ea typeface="Calibri" pitchFamily="34" charset="-122"/>
-                <a:cs typeface="Calibri" pitchFamily="34" charset="-120"/>
-              </a:rPr>
-              <a:t>고객 환경의 장애를 분석하고 보고</a:t>
-            </a:r>
-            <a:endParaRPr lang="en-US" sz="1250" dirty="0"/>
-          </a:p>
-          <a:p>
-            <a:pPr marL="342900" indent="-342900">
-              <a:spcAft>
-                <a:spcPts val="1100"/>
-              </a:spcAft>
-              <a:buSzPct val="100000"/>
-              <a:buChar char="•"/>
-            </a:pPr>
-            <a:r>
-              <a:rPr lang="en-US" sz="1250" dirty="0">
-                <a:solidFill>
-                  <a:srgbClr val="3A3F52"/>
-                </a:solidFill>
-                <a:latin typeface="Calibri" pitchFamily="34" charset="0"/>
-                <a:ea typeface="Calibri" pitchFamily="34" charset="-122"/>
-                <a:cs typeface="Calibri" pitchFamily="34" charset="-120"/>
-              </a:rPr>
-              <a:t>정해진 절차로 서버·DB·백업을 점검</a:t>
-            </a:r>
-            <a:endParaRPr lang="en-US" sz="1250" dirty="0"/>
-          </a:p>
-          <a:p>
-            <a:pPr marL="342900" indent="-342900">
-              <a:spcAft>
-                <a:spcPts val="1100"/>
-              </a:spcAft>
-              <a:buSzPct val="100000"/>
-              <a:buChar char="•"/>
-            </a:pPr>
-            <a:r>
-              <a:rPr lang="en-US" sz="1250" dirty="0">
-                <a:solidFill>
-                  <a:srgbClr val="3A3F52"/>
-                </a:solidFill>
-                <a:latin typeface="Calibri" pitchFamily="34" charset="0"/>
-                <a:ea typeface="Calibri" pitchFamily="34" charset="-122"/>
-                <a:cs typeface="Calibri" pitchFamily="34" charset="-120"/>
-              </a:rPr>
-              <a:t>Docker 이미지로 환경 표준화 (제공 시간 40%↓)</a:t>
-            </a:r>
-            <a:endParaRPr lang="en-US" sz="1250" dirty="0"/>
-          </a:p>
-        </p:txBody>
-      </p:sp>
-      <p:sp>
-        <p:nvSpPr>
-          <p:cNvPr id="10" name="Shape 8"/>
-          <p:cNvSpPr/>
-          <p:nvPr/>
-        </p:nvSpPr>
-        <p:spPr>
-          <a:xfrm>
-            <a:off x="6217920" y="2194560"/>
-            <a:ext cx="5394960" cy="3977640"/>
-          </a:xfrm>
-          <a:prstGeom prst="roundRect">
-            <a:avLst>
-              <a:gd name="adj" fmla="val 2069"/>
-            </a:avLst>
-          </a:prstGeom>
-          <a:solidFill>
-            <a:srgbClr val="E8EEFB"/>
-          </a:solidFill>
-          <a:ln/>
-          <a:effectLst>
-            <a:outerShdw sx="100000" sy="100000" kx="0" ky="0" algn="bl" rotWithShape="0" blurRad="76200" dist="25400" dir="5400000">
-              <a:srgbClr val="9AA3C0">
-                <a:alpha val="30000"/>
-              </a:srgbClr>
-            </a:outerShdw>
-          </a:effectLst>
-        </p:spPr>
-      </p:sp>
-      <p:sp>
-        <p:nvSpPr>
-          <p:cNvPr id="11" name="Text 9"/>
-          <p:cNvSpPr/>
-          <p:nvPr/>
-        </p:nvSpPr>
-        <p:spPr>
-          <a:xfrm>
-            <a:off x="6537960" y="2423160"/>
-            <a:ext cx="4754880" cy="411480"/>
-          </a:xfrm>
-          <a:prstGeom prst="rect">
-            <a:avLst/>
-          </a:prstGeom>
-          <a:noFill/>
-          <a:ln/>
-        </p:spPr>
-        <p:txBody>
-          <a:bodyPr wrap="square" lIns="0" tIns="0" rIns="0" bIns="0" rtlCol="0" anchor="ctr"/>
-          <a:lstStyle/>
-          <a:p>
-            <a:pPr indent="0" marL="0">
-              <a:buNone/>
-            </a:pPr>
-            <a:r>
-              <a:rPr lang="en-US" sz="1700" b="1" dirty="0">
-                <a:solidFill>
-                  <a:srgbClr val="1E2761"/>
-                </a:solidFill>
-                <a:latin typeface="Cambria" pitchFamily="34" charset="0"/>
-                <a:ea typeface="Cambria" pitchFamily="34" charset="-122"/>
-                <a:cs typeface="Cambria" pitchFamily="34" charset="-120"/>
-              </a:rPr>
-              <a:t>새로운 관점 (After)</a:t>
-            </a:r>
-            <a:endParaRPr lang="en-US" sz="1700" dirty="0"/>
-          </a:p>
-        </p:txBody>
-      </p:sp>
-      <p:sp>
-        <p:nvSpPr>
-          <p:cNvPr id="12" name="Text 10"/>
-          <p:cNvSpPr/>
-          <p:nvPr/>
-        </p:nvSpPr>
-        <p:spPr>
-          <a:xfrm>
-            <a:off x="6537960" y="2852928"/>
-            <a:ext cx="4754880" cy="320040"/>
-          </a:xfrm>
-          <a:prstGeom prst="rect">
-            <a:avLst/>
-          </a:prstGeom>
-          <a:noFill/>
-          <a:ln/>
-        </p:spPr>
-        <p:txBody>
-          <a:bodyPr wrap="square" lIns="0" tIns="0" rIns="0" bIns="0" rtlCol="0" anchor="ctr"/>
-          <a:lstStyle/>
-          <a:p>
-            <a:pPr indent="0" marL="0">
-              <a:buNone/>
-            </a:pPr>
-            <a:r>
-              <a:rPr lang="en-US" sz="1150" b="1" dirty="0">
-                <a:solidFill>
-                  <a:srgbClr val="5B79D6"/>
-                </a:solidFill>
-                <a:latin typeface="Calibri" pitchFamily="34" charset="0"/>
-                <a:ea typeface="Calibri" pitchFamily="34" charset="-122"/>
-                <a:cs typeface="Calibri" pitchFamily="34" charset="-120"/>
-              </a:rPr>
-              <a:t>이 프로젝트 — 직접 설계·검증</a:t>
-            </a:r>
-            <a:endParaRPr lang="en-US" sz="1150" dirty="0"/>
-          </a:p>
-        </p:txBody>
-      </p:sp>
-      <p:sp>
-        <p:nvSpPr>
-          <p:cNvPr id="13" name="Text 11"/>
-          <p:cNvSpPr/>
-          <p:nvPr/>
-        </p:nvSpPr>
-        <p:spPr>
-          <a:xfrm>
-            <a:off x="6537960" y="3337560"/>
-            <a:ext cx="4800600" cy="2651760"/>
-          </a:xfrm>
-          <a:prstGeom prst="rect">
-            <a:avLst/>
-          </a:prstGeom>
-          <a:noFill/>
-          <a:ln/>
-        </p:spPr>
-        <p:txBody>
-          <a:bodyPr wrap="square" lIns="0" tIns="0" rIns="0" bIns="0" rtlCol="0" anchor="t"/>
-          <a:lstStyle/>
-          <a:p>
-            <a:pPr marL="342900" indent="-342900">
-              <a:spcAft>
-                <a:spcPts val="1100"/>
-              </a:spcAft>
-              <a:buSzPct val="100000"/>
-              <a:buChar char="•"/>
-            </a:pPr>
-            <a:r>
-              <a:rPr lang="en-US" sz="1250" dirty="0">
-                <a:solidFill>
-                  <a:srgbClr val="3A3F52"/>
-                </a:solidFill>
-                <a:latin typeface="Calibri" pitchFamily="34" charset="0"/>
-                <a:ea typeface="Calibri" pitchFamily="34" charset="-122"/>
-                <a:cs typeface="Calibri" pitchFamily="34" charset="-120"/>
-              </a:rPr>
-              <a:t>알람 임계값을 직접 판단 (HPA 50% · 재시작 감지)</a:t>
-            </a:r>
-            <a:endParaRPr lang="en-US" sz="1250" dirty="0"/>
-          </a:p>
-          <a:p>
-            <a:pPr marL="342900" indent="-342900">
-              <a:spcAft>
-                <a:spcPts val="1100"/>
-              </a:spcAft>
-              <a:buSzPct val="100000"/>
-              <a:buChar char="•"/>
-            </a:pPr>
-            <a:r>
-              <a:rPr lang="en-US" sz="1250" dirty="0">
-                <a:solidFill>
-                  <a:srgbClr val="3A3F52"/>
-                </a:solidFill>
-                <a:latin typeface="Calibri" pitchFamily="34" charset="0"/>
-                <a:ea typeface="Calibri" pitchFamily="34" charset="-122"/>
-                <a:cs typeface="Calibri" pitchFamily="34" charset="-120"/>
-              </a:rPr>
-              <a:t>장애를 직접 주입해 경보 경로를 검증</a:t>
-            </a:r>
-            <a:endParaRPr lang="en-US" sz="1250" dirty="0"/>
-          </a:p>
-          <a:p>
-            <a:pPr marL="342900" indent="-342900">
-              <a:spcAft>
-                <a:spcPts val="1100"/>
-              </a:spcAft>
-              <a:buSzPct val="100000"/>
-              <a:buChar char="•"/>
-            </a:pPr>
-            <a:r>
-              <a:rPr lang="en-US" sz="1250" dirty="0">
-                <a:solidFill>
-                  <a:srgbClr val="3A3F52"/>
-                </a:solidFill>
-                <a:latin typeface="Calibri" pitchFamily="34" charset="0"/>
-                <a:ea typeface="Calibri" pitchFamily="34" charset="-122"/>
-                <a:cs typeface="Calibri" pitchFamily="34" charset="-120"/>
-              </a:rPr>
-              <a:t>재기동 9단계·종료 4단계 절차를 직접 작성</a:t>
-            </a:r>
-            <a:endParaRPr lang="en-US" sz="1250" dirty="0"/>
-          </a:p>
-          <a:p>
-            <a:pPr marL="342900" indent="-342900">
-              <a:spcAft>
-                <a:spcPts val="1100"/>
-              </a:spcAft>
-              <a:buSzPct val="100000"/>
-              <a:buChar char="•"/>
-            </a:pPr>
-            <a:r>
-              <a:rPr lang="en-US" sz="1250" dirty="0">
-                <a:solidFill>
-                  <a:srgbClr val="3A3F52"/>
-                </a:solidFill>
-                <a:latin typeface="Calibri" pitchFamily="34" charset="0"/>
-                <a:ea typeface="Calibri" pitchFamily="34" charset="-122"/>
-                <a:cs typeface="Calibri" pitchFamily="34" charset="-120"/>
-              </a:rPr>
-              <a:t>표준화를 파이프라인 자동화로 확장 (CI→ECR→ArgoCD)</a:t>
-            </a:r>
-            <a:endParaRPr lang="en-US" sz="1250" dirty="0"/>
           </a:p>
         </p:txBody>
       </p:sp>
@@ -11569,7 +10847,7 @@
                 <a:ea typeface="Calibri" pitchFamily="34" charset="-122"/>
                 <a:cs typeface="Calibri" pitchFamily="34" charset="-120"/>
               </a:rPr>
-              <a:t>PAGE 01</a:t>
+              <a:t>PAGE 03</a:t>
             </a:r>
             <a:endParaRPr lang="en-US" sz="1000" dirty="0"/>
           </a:p>
@@ -11596,6 +10874,10 @@
           </a:solidFill>
           <a:ln/>
         </p:spPr>
+        <p:txBody>
+          <a:bodyPr/>
+          <a:p/>
+        </p:txBody>
       </p:sp>
       <p:sp>
         <p:nvSpPr>
@@ -11673,7 +10955,7 @@
                 <a:ea typeface="Calibri" pitchFamily="34" charset="-122"/>
                 <a:cs typeface="Calibri" pitchFamily="34" charset="-120"/>
               </a:rPr>
-              <a:t>통합관제 솔루션(ZENIUS) 기술지원 — KT Cloud(PPP)·온프레미스에 관제 시스템 구축, Linux·PostgreSQL 장애 분석</a:t>
+              <a:t>통합관제 솔루션(ZENIUS) 기술지원: KT Cloud(PPP)와 온프레미스에 관제 시스템을 구축하고 Linux·PostgreSQL 장애를 분석</a:t>
             </a:r>
             <a:endParaRPr lang="en-US" sz="1350" dirty="0"/>
           </a:p>
@@ -11691,7 +10973,7 @@
                 <a:ea typeface="Calibri" pitchFamily="34" charset="-122"/>
                 <a:cs typeface="Calibri" pitchFamily="34" charset="-120"/>
               </a:rPr>
-              <a:t>AI 클라우드 운영 — Docker 이미지 표준화로 개발 환경 제공 시간 40% 단축 (NHN·Naver Cloud)</a:t>
+              <a:t>AI 클라우드 운영(NHN·Naver Cloud): Docker 이미지 표준화로 개발 환경 제공 시간 40% 단축</a:t>
             </a:r>
             <a:endParaRPr lang="en-US" sz="1350" dirty="0"/>
           </a:p>
@@ -11709,7 +10991,7 @@
                 <a:ea typeface="Calibri" pitchFamily="34" charset="-122"/>
                 <a:cs typeface="Calibri" pitchFamily="34" charset="-120"/>
               </a:rPr>
-              <a:t>운영에서 체감한 수작업의 한계를, AWS SA Professional 설계 지식 기반의 직접 구축·검증으로 해소</a:t>
+              <a:t>운영하며 느낀 수작업의 한계를, AWS SAP를 준비하며 익힌 설계 지식으로 직접 구축하고 검증해 봤습니다</a:t>
             </a:r>
             <a:endParaRPr lang="en-US" sz="1350" dirty="0"/>
           </a:p>
@@ -11743,6 +11025,10 @@
             </a:outerShdw>
           </a:effectLst>
         </p:spPr>
+        <p:txBody>
+          <a:bodyPr/>
+          <a:p/>
+        </p:txBody>
       </p:sp>
       <p:sp>
         <p:nvSpPr>
@@ -11855,7 +11141,7 @@
                 <a:ea typeface="Calibri" pitchFamily="34" charset="-122"/>
                 <a:cs typeface="Calibri" pitchFamily="34" charset="-120"/>
               </a:rPr>
-              <a:t>Terraform 리소스 78개 전체 코드화</a:t>
+              <a:t>Terraform으로 리소스 78개 코드화</a:t>
             </a:r>
             <a:endParaRPr lang="en-US" sz="1200" dirty="0"/>
           </a:p>
@@ -11872,7 +11158,7 @@
                 <a:ea typeface="Calibri" pitchFamily="34" charset="-122"/>
                 <a:cs typeface="Calibri" pitchFamily="34" charset="-120"/>
               </a:rPr>
-              <a:t>Apply 한 번의 동일 환경 재현</a:t>
+              <a:t>apply 한 번으로 같은 환경 재현</a:t>
             </a:r>
             <a:endParaRPr lang="en-US" sz="1200" dirty="0"/>
           </a:p>
@@ -11906,6 +11192,10 @@
             </a:outerShdw>
           </a:effectLst>
         </p:spPr>
+        <p:txBody>
+          <a:bodyPr/>
+          <a:p/>
+        </p:txBody>
       </p:sp>
       <p:sp>
         <p:nvSpPr>
@@ -12018,7 +11308,7 @@
                 <a:ea typeface="Calibri" pitchFamily="34" charset="-122"/>
                 <a:cs typeface="Calibri" pitchFamily="34" charset="-120"/>
               </a:rPr>
-              <a:t>push 한 번으로 빌드→자동 배포</a:t>
+              <a:t>push 한 번으로 빌드부터 배포까지</a:t>
             </a:r>
             <a:endParaRPr lang="en-US" sz="1200" dirty="0"/>
           </a:p>
@@ -12035,7 +11325,7 @@
                 <a:ea typeface="Calibri" pitchFamily="34" charset="-122"/>
                 <a:cs typeface="Calibri" pitchFamily="34" charset="-120"/>
               </a:rPr>
-              <a:t>ArgoCD drift 감지·자동 복구</a:t>
+              <a:t>ArgoCD가 drift 감지·자동 복구</a:t>
             </a:r>
             <a:endParaRPr lang="en-US" sz="1200" dirty="0"/>
           </a:p>
@@ -12069,6 +11359,10 @@
             </a:outerShdw>
           </a:effectLst>
         </p:spPr>
+        <p:txBody>
+          <a:bodyPr/>
+          <a:p/>
+        </p:txBody>
       </p:sp>
       <p:sp>
         <p:nvSpPr>
@@ -12232,6 +11526,10 @@
             </a:outerShdw>
           </a:effectLst>
         </p:spPr>
+        <p:txBody>
+          <a:bodyPr/>
+          <a:p/>
+        </p:txBody>
       </p:sp>
       <p:sp>
         <p:nvSpPr>
@@ -12344,7 +11642,7 @@
                 <a:ea typeface="Calibri" pitchFamily="34" charset="-122"/>
                 <a:cs typeface="Calibri" pitchFamily="34" charset="-120"/>
               </a:rPr>
-              <a:t>Slack 알람 실수신 검증</a:t>
+              <a:t>Slack 알람 실제 수신 확인</a:t>
             </a:r>
             <a:endParaRPr lang="en-US" sz="1200" dirty="0"/>
           </a:p>
@@ -12361,7 +11659,7 @@
                 <a:ea typeface="Calibri" pitchFamily="34" charset="-122"/>
                 <a:cs typeface="Calibri" pitchFamily="34" charset="-120"/>
               </a:rPr>
-              <a:t>HPA 2→6→2 오토스케일링 실증</a:t>
+              <a:t>HPA 2→6→2 증감 확인</a:t>
             </a:r>
             <a:endParaRPr lang="en-US" sz="1200" dirty="0"/>
           </a:p>
@@ -12471,7 +11769,7 @@
                 <a:ea typeface="Calibri" pitchFamily="34" charset="-122"/>
                 <a:cs typeface="Calibri" pitchFamily="34" charset="-120"/>
               </a:rPr>
-              <a:t>PAGE 02</a:t>
+              <a:t>PAGE 04</a:t>
             </a:r>
             <a:endParaRPr lang="en-US" sz="1000" dirty="0"/>
           </a:p>
@@ -12589,7 +11887,7 @@
                           <a:ea typeface="Calibri" pitchFamily="34" charset="-122"/>
                           <a:cs typeface="Calibri" pitchFamily="34" charset="-120"/>
                         </a:rPr>
-                        <a:t>AI 텍스트 요약 서비스를 EKS 위에 GitOps로 배포 + 관측성·오토스케일링 구축</a:t>
+                        <a:t>AI 텍스트 요약 서비스를 EKS에 GitOps로 배포하고, 관측성과 오토스케일링까지 구축</a:t>
                       </a:r>
                       <a:endParaRPr lang="en-US" sz="1450" dirty="0">
                         <a:latin typeface="Calibri" charset="0"/>
@@ -13080,7 +12378,7 @@
                 <a:ea typeface="Calibri" pitchFamily="34" charset="-122"/>
                 <a:cs typeface="Calibri" pitchFamily="34" charset="-120"/>
               </a:rPr>
-              <a:t>전 항목 실증 완료</a:t>
+              <a:t>전 항목 검증 완료</a:t>
             </a:r>
             <a:endParaRPr lang="en-US" sz="1400" dirty="0"/>
           </a:p>
@@ -13107,6 +12405,10 @@
           </a:solidFill>
           <a:ln/>
         </p:spPr>
+        <p:txBody>
+          <a:bodyPr/>
+          <a:p/>
+        </p:txBody>
       </p:sp>
       <p:sp>
         <p:nvSpPr>
@@ -13182,6 +12484,10 @@
           </a:solidFill>
           <a:ln/>
         </p:spPr>
+        <p:txBody>
+          <a:bodyPr/>
+          <a:p/>
+        </p:txBody>
       </p:sp>
       <p:sp>
         <p:nvSpPr>
@@ -13257,6 +12563,10 @@
           </a:solidFill>
           <a:ln/>
         </p:spPr>
+        <p:txBody>
+          <a:bodyPr/>
+          <a:p/>
+        </p:txBody>
       </p:sp>
       <p:sp>
         <p:nvSpPr>
@@ -13332,6 +12642,10 @@
           </a:solidFill>
           <a:ln/>
         </p:spPr>
+        <p:txBody>
+          <a:bodyPr/>
+          <a:p/>
+        </p:txBody>
       </p:sp>
       <p:sp>
         <p:nvSpPr>
@@ -13380,7 +12694,7 @@
                 <a:ea typeface="Calibri" pitchFamily="34" charset="-122"/>
                 <a:cs typeface="Calibri" pitchFamily="34" charset="-120"/>
               </a:rPr>
-              <a:t>Slack 알람 실수신</a:t>
+              <a:t>Slack 알람 수신</a:t>
             </a:r>
             <a:endParaRPr lang="en-US" sz="1350" dirty="0"/>
           </a:p>
@@ -13490,7 +12804,7 @@
                 <a:ea typeface="Calibri" pitchFamily="34" charset="-122"/>
                 <a:cs typeface="Calibri" pitchFamily="34" charset="-120"/>
               </a:rPr>
-              <a:t>PAGE 03</a:t>
+              <a:t>PAGE 05</a:t>
             </a:r>
             <a:endParaRPr lang="en-US" sz="1000" dirty="0"/>
           </a:p>
@@ -13522,6 +12836,10 @@
             <a:prstDash val="solid"/>
           </a:ln>
         </p:spPr>
+        <p:txBody>
+          <a:bodyPr/>
+          <a:p/>
+        </p:txBody>
       </p:sp>
       <p:sp>
         <p:nvSpPr>
@@ -13581,6 +12899,10 @@
           </a:solidFill>
           <a:ln/>
         </p:spPr>
+        <p:txBody>
+          <a:bodyPr/>
+          <a:p/>
+        </p:txBody>
       </p:sp>
       <p:sp>
         <p:nvSpPr>
@@ -13608,6 +12930,10 @@
             <a:prstDash val="solid"/>
           </a:ln>
         </p:spPr>
+        <p:txBody>
+          <a:bodyPr/>
+          <a:p/>
+        </p:txBody>
       </p:sp>
       <p:sp>
         <p:nvSpPr>
@@ -13684,6 +13010,10 @@
           </a:solidFill>
           <a:ln/>
         </p:spPr>
+        <p:txBody>
+          <a:bodyPr/>
+          <a:p/>
+        </p:txBody>
       </p:sp>
       <p:sp>
         <p:nvSpPr>
@@ -13711,6 +13041,10 @@
             <a:prstDash val="solid"/>
           </a:ln>
         </p:spPr>
+        <p:txBody>
+          <a:bodyPr/>
+          <a:p/>
+        </p:txBody>
       </p:sp>
       <p:sp>
         <p:nvSpPr>
@@ -13770,6 +13104,10 @@
           </a:solidFill>
           <a:ln/>
         </p:spPr>
+        <p:txBody>
+          <a:bodyPr/>
+          <a:p/>
+        </p:txBody>
       </p:sp>
       <p:sp>
         <p:nvSpPr>
@@ -13797,6 +13135,10 @@
             <a:prstDash val="solid"/>
           </a:ln>
         </p:spPr>
+        <p:txBody>
+          <a:bodyPr/>
+          <a:p/>
+        </p:txBody>
       </p:sp>
       <p:sp>
         <p:nvSpPr>
@@ -13873,6 +13215,10 @@
           </a:solidFill>
           <a:ln/>
         </p:spPr>
+        <p:txBody>
+          <a:bodyPr/>
+          <a:p/>
+        </p:txBody>
       </p:sp>
       <p:sp>
         <p:nvSpPr>
@@ -13900,6 +13246,10 @@
             <a:prstDash val="solid"/>
           </a:ln>
         </p:spPr>
+        <p:txBody>
+          <a:bodyPr/>
+          <a:p/>
+        </p:txBody>
       </p:sp>
       <p:sp>
         <p:nvSpPr>
@@ -13976,6 +13326,10 @@
           </a:solidFill>
           <a:ln/>
         </p:spPr>
+        <p:txBody>
+          <a:bodyPr/>
+          <a:p/>
+        </p:txBody>
       </p:sp>
       <p:sp>
         <p:nvSpPr>
@@ -14003,6 +13357,10 @@
             <a:prstDash val="solid"/>
           </a:ln>
         </p:spPr>
+        <p:txBody>
+          <a:bodyPr/>
+          <a:p/>
+        </p:txBody>
       </p:sp>
       <p:sp>
         <p:nvSpPr>
@@ -14117,7 +13475,7 @@
                 <a:ea typeface="Calibri" pitchFamily="34" charset="-122"/>
                 <a:cs typeface="Calibri" pitchFamily="34" charset="-120"/>
               </a:rPr>
-              <a:t>런타임 구성도 — 3계층 격리 · 아웃바운드 단일 경로(NAT) · 지표 중계(RDS→CloudWatch→EKS)</a:t>
+              <a:t>런타임 구성도: 3계층 서브넷 격리, NAT 단일 아웃바운드, RDS 지표는 CloudWatch를 거쳐 EKS로</a:t>
             </a:r>
             <a:endParaRPr lang="en-US" sz="1050" dirty="0"/>
           </a:p>
@@ -14181,6 +13539,10 @@
           </a:solidFill>
           <a:ln/>
         </p:spPr>
+        <p:txBody>
+          <a:bodyPr/>
+          <a:p/>
+        </p:txBody>
       </p:sp>
       <p:sp>
         <p:nvSpPr>
@@ -14318,6 +13680,10 @@
           </a:solidFill>
           <a:ln/>
         </p:spPr>
+        <p:txBody>
+          <a:bodyPr/>
+          <a:p/>
+        </p:txBody>
       </p:sp>
       <p:sp>
         <p:nvSpPr>
@@ -14406,7 +13772,7 @@
         <p:spPr>
           <a:xfrm>
             <a:off x="8412480" y="4023360"/>
-            <a:ext cx="3200400" cy="320040"/>
+            <a:ext cx="3500000" cy="320040"/>
           </a:xfrm>
           <a:prstGeom prst="rect">
             <a:avLst/>
@@ -14422,7 +13788,7 @@
               <a:buNone/>
             </a:pPr>
             <a:r>
-              <a:rPr lang="en-US" sz="1200" dirty="0">
+              <a:rPr lang="en-US" sz="1100" dirty="0">
                 <a:solidFill>
                   <a:srgbClr val="6B7089"/>
                 </a:solidFill>
@@ -14430,7 +13796,7 @@
                 <a:ea typeface="Calibri" pitchFamily="34" charset="-122"/>
                 <a:cs typeface="Calibri" pitchFamily="34" charset="-120"/>
               </a:rPr>
-              <a:t>IRSA 4종으로 권한 분리</a:t>
+              <a:t>IRSA 3종: ALB Controller · EBS CSI · CloudWatch exporter</a:t>
             </a:r>
             <a:endParaRPr lang="en-US" sz="1200" dirty="0"/>
           </a:p>
@@ -14455,6 +13821,10 @@
           </a:solidFill>
           <a:ln/>
         </p:spPr>
+        <p:txBody>
+          <a:bodyPr/>
+          <a:p/>
+        </p:txBody>
       </p:sp>
       <p:sp>
         <p:nvSpPr>
@@ -14638,7 +14008,7 @@
                 <a:ea typeface="Cambria" pitchFamily="34" charset="-122"/>
                 <a:cs typeface="Cambria" pitchFamily="34" charset="-120"/>
               </a:rPr>
-              <a:t>03. 아키텍처 흐름도 구성 — 핵심 설계 의도</a:t>
+              <a:t>03. 아키텍처 흐름도 구성 - 핵심 설계 의도</a:t>
             </a:r>
             <a:endParaRPr lang="en-US" sz="2800" dirty="0"/>
           </a:p>
@@ -14677,7 +14047,7 @@
                 <a:ea typeface="Calibri" pitchFamily="34" charset="-122"/>
                 <a:cs typeface="Calibri" pitchFamily="34" charset="-120"/>
               </a:rPr>
-              <a:t>PAGE 04</a:t>
+              <a:t>PAGE 06</a:t>
             </a:r>
             <a:endParaRPr lang="en-US" sz="1000" dirty="0"/>
           </a:p>
@@ -14704,6 +14074,10 @@
           </a:solidFill>
           <a:ln/>
         </p:spPr>
+        <p:txBody>
+          <a:bodyPr/>
+          <a:p/>
+        </p:txBody>
       </p:sp>
       <p:sp>
         <p:nvSpPr>
@@ -14777,7 +14151,7 @@
                 <a:ea typeface="Calibri" pitchFamily="34" charset="-122"/>
                 <a:cs typeface="Calibri" pitchFamily="34" charset="-120"/>
               </a:rPr>
-              <a:t>1) 외부 진입점을 ALB 한 줄기로 단일화 — 파드 IP 직접 라우팅(target-type: ip)으로 홉 최소화</a:t>
+              <a:t>1) 외부 진입점은 ALB 하나로. target-type: ip로 파드에 직접 라우팅해 홉을 줄임</a:t>
             </a:r>
             <a:endParaRPr lang="en-US" sz="1500" dirty="0"/>
           </a:p>
@@ -14816,7 +14190,7 @@
                 <a:ea typeface="Calibri" pitchFamily="34" charset="-122"/>
                 <a:cs typeface="Calibri" pitchFamily="34" charset="-120"/>
               </a:rPr>
-              <a:t>2) 민감 자원 격리 — EKS·RDS는 Private/DB 서브넷, RDS는 노드 SG 참조 방식으로 5432만 허용</a:t>
+              <a:t>2) EKS·RDS는 Private/DB 서브넷에 두고, RDS는 노드 SG를 참조해 5432만 허용</a:t>
             </a:r>
             <a:endParaRPr lang="en-US" sz="1500" dirty="0"/>
           </a:p>
@@ -14855,7 +14229,7 @@
                 <a:ea typeface="Calibri" pitchFamily="34" charset="-122"/>
                 <a:cs typeface="Calibri" pitchFamily="34" charset="-120"/>
               </a:rPr>
-              <a:t>3) AWS 자원 전량 Terraform 재현 — 서브넷 태그까지 코드 명시, destroy 후 13개 항목 잔여물 전수검증</a:t>
+              <a:t>3) AWS 자원은 전부 Terraform으로. 서브넷 태그까지 코드에 적고, destroy 후 잔여물 13개 항목을 직접 확인</a:t>
             </a:r>
             <a:endParaRPr lang="en-US" sz="1500" dirty="0"/>
           </a:p>
@@ -14894,7 +14268,7 @@
                 <a:ea typeface="Calibri" pitchFamily="34" charset="-122"/>
                 <a:cs typeface="Calibri" pitchFamily="34" charset="-120"/>
               </a:rPr>
-              <a:t>4) 부하는 HPA가, 배포는 ArgoCD가 — replicas 소유권을 나눠 자동화 도구끼리의 충돌까지 설계</a:t>
+              <a:t>4) 부하는 HPA가, 배포는 ArgoCD가. replicas 소유권을 나눠 두 도구가 충돌하지 않게 함</a:t>
             </a:r>
             <a:endParaRPr lang="en-US" sz="1500" dirty="0"/>
           </a:p>
@@ -15004,7 +14378,7 @@
                 <a:ea typeface="Calibri" pitchFamily="34" charset="-122"/>
                 <a:cs typeface="Calibri" pitchFamily="34" charset="-120"/>
               </a:rPr>
-              <a:t>PAGE 05</a:t>
+              <a:t>PAGE 07</a:t>
             </a:r>
             <a:endParaRPr lang="en-US" sz="1000" dirty="0"/>
           </a:p>
@@ -15038,6 +14412,10 @@
             </a:outerShdw>
           </a:effectLst>
         </p:spPr>
+        <p:txBody>
+          <a:bodyPr/>
+          <a:p/>
+        </p:txBody>
       </p:sp>
       <p:sp>
         <p:nvSpPr>
@@ -15201,6 +14579,10 @@
             </a:outerShdw>
           </a:effectLst>
         </p:spPr>
+        <p:txBody>
+          <a:bodyPr/>
+          <a:p/>
+        </p:txBody>
       </p:sp>
       <p:sp>
         <p:nvSpPr>
@@ -15364,6 +14746,10 @@
             </a:outerShdw>
           </a:effectLst>
         </p:spPr>
+        <p:txBody>
+          <a:bodyPr/>
+          <a:p/>
+        </p:txBody>
       </p:sp>
       <p:sp>
         <p:nvSpPr>
@@ -15437,7 +14823,7 @@
                 <a:ea typeface="Calibri" pitchFamily="34" charset="-122"/>
                 <a:cs typeface="Calibri" pitchFamily="34" charset="-120"/>
               </a:rPr>
-              <a:t>Terraform</a:t>
+              <a:t>Terraform · S3 (원격 state)</a:t>
             </a:r>
             <a:endParaRPr lang="en-US" sz="1250" dirty="0"/>
           </a:p>
@@ -15493,7 +14879,7 @@
                 <a:ea typeface="Calibri" pitchFamily="34" charset="-122"/>
                 <a:cs typeface="Calibri" pitchFamily="34" charset="-120"/>
               </a:rPr>
-              <a:t>재현·관리</a:t>
+              <a:t>state는 S3에 두고 destroy·apply 반복</a:t>
             </a:r>
             <a:endParaRPr lang="en-US" sz="1200" dirty="0"/>
           </a:p>
@@ -15527,6 +14913,10 @@
             </a:outerShdw>
           </a:effectLst>
         </p:spPr>
+        <p:txBody>
+          <a:bodyPr/>
+          <a:p/>
+        </p:txBody>
       </p:sp>
       <p:sp>
         <p:nvSpPr>
@@ -15690,6 +15080,10 @@
             </a:outerShdw>
           </a:effectLst>
         </p:spPr>
+        <p:txBody>
+          <a:bodyPr/>
+          <a:p/>
+        </p:txBody>
       </p:sp>
       <p:sp>
         <p:nvSpPr>
@@ -15853,6 +15247,10 @@
             </a:outerShdw>
           </a:effectLst>
         </p:spPr>
+        <p:txBody>
+          <a:bodyPr/>
+          <a:p/>
+        </p:txBody>
       </p:sp>
       <p:sp>
         <p:nvSpPr>
@@ -16053,7 +15451,7 @@
                 <a:ea typeface="Cambria" pitchFamily="34" charset="-122"/>
                 <a:cs typeface="Cambria" pitchFamily="34" charset="-120"/>
               </a:rPr>
-              <a:t>05. 애플리케이션 구성 — 인프라를 관통하는 검증 단위</a:t>
+              <a:t>05. 애플리케이션 구성 - 인프라 전체를 지나가는 검증 단위</a:t>
             </a:r>
             <a:endParaRPr lang="en-US" sz="2800" dirty="0"/>
           </a:p>
@@ -16092,7 +15490,7 @@
                 <a:ea typeface="Calibri" pitchFamily="34" charset="-122"/>
                 <a:cs typeface="Calibri" pitchFamily="34" charset="-120"/>
               </a:rPr>
-              <a:t>PAGE 06</a:t>
+              <a:t>PAGE 08</a:t>
             </a:r>
             <a:endParaRPr lang="en-US" sz="1000" dirty="0"/>
           </a:p>
@@ -16202,6 +15600,10 @@
             <a:prstDash val="solid"/>
           </a:ln>
         </p:spPr>
+        <p:txBody>
+          <a:bodyPr/>
+          <a:p/>
+        </p:txBody>
       </p:sp>
       <p:sp>
         <p:nvSpPr>
@@ -16261,6 +15663,10 @@
           </a:solidFill>
           <a:ln/>
         </p:spPr>
+        <p:txBody>
+          <a:bodyPr/>
+          <a:p/>
+        </p:txBody>
       </p:sp>
       <p:sp>
         <p:nvSpPr>
@@ -16288,6 +15694,10 @@
             <a:prstDash val="solid"/>
           </a:ln>
         </p:spPr>
+        <p:txBody>
+          <a:bodyPr/>
+          <a:p/>
+        </p:txBody>
       </p:sp>
       <p:sp>
         <p:nvSpPr>
@@ -16347,6 +15757,10 @@
           </a:solidFill>
           <a:ln/>
         </p:spPr>
+        <p:txBody>
+          <a:bodyPr/>
+          <a:p/>
+        </p:txBody>
       </p:sp>
       <p:sp>
         <p:nvSpPr>
@@ -16374,6 +15788,10 @@
             <a:prstDash val="solid"/>
           </a:ln>
         </p:spPr>
+        <p:txBody>
+          <a:bodyPr/>
+          <a:p/>
+        </p:txBody>
       </p:sp>
       <p:sp>
         <p:nvSpPr>
@@ -16433,6 +15851,10 @@
           </a:solidFill>
           <a:ln/>
         </p:spPr>
+        <p:txBody>
+          <a:bodyPr/>
+          <a:p/>
+        </p:txBody>
       </p:sp>
       <p:sp>
         <p:nvSpPr>
@@ -16460,6 +15882,10 @@
             <a:prstDash val="solid"/>
           </a:ln>
         </p:spPr>
+        <p:txBody>
+          <a:bodyPr/>
+          <a:p/>
+        </p:txBody>
       </p:sp>
       <p:sp>
         <p:nvSpPr>
@@ -16536,6 +15962,10 @@
           </a:solidFill>
           <a:ln/>
         </p:spPr>
+        <p:txBody>
+          <a:bodyPr/>
+          <a:p/>
+        </p:txBody>
       </p:sp>
       <p:sp>
         <p:nvSpPr>
@@ -16563,6 +15993,10 @@
             <a:prstDash val="solid"/>
           </a:ln>
         </p:spPr>
+        <p:txBody>
+          <a:bodyPr/>
+          <a:p/>
+        </p:txBody>
       </p:sp>
       <p:sp>
         <p:nvSpPr>
@@ -16661,6 +16095,10 @@
           </a:solidFill>
           <a:ln/>
         </p:spPr>
+        <p:txBody>
+          <a:bodyPr/>
+          <a:p/>
+        </p:txBody>
       </p:sp>
       <p:sp>
         <p:nvSpPr>
@@ -16748,7 +16186,7 @@
                 <a:ea typeface="Calibri" pitchFamily="34" charset="-122"/>
                 <a:cs typeface="Calibri" pitchFamily="34" charset="-120"/>
               </a:rPr>
-              <a:t>상태는 전부 RDS로 — 파드는 언제 죽어도 되는 소모품 (HPA 증감·Spot 회수의 전제)</a:t>
+              <a:t>상태는 전부 RDS에. 파드는 언제 죽어도 되는 소모품</a:t>
             </a:r>
             <a:endParaRPr lang="en-US" sz="1350" dirty="0"/>
           </a:p>
@@ -16773,6 +16211,10 @@
           </a:solidFill>
           <a:ln/>
         </p:spPr>
+        <p:txBody>
+          <a:bodyPr/>
+          <a:p/>
+        </p:txBody>
       </p:sp>
       <p:sp>
         <p:nvSpPr>
@@ -16860,7 +16302,7 @@
                 <a:ea typeface="Calibri" pitchFamily="34" charset="-122"/>
                 <a:cs typeface="Calibri" pitchFamily="34" charset="-120"/>
               </a:rPr>
-              <a:t>쿠버네티스 Secret이 환경변수로 주입 — 코드·이미지·repo 어디에도 없음</a:t>
+              <a:t>쿠버네티스 Secret을 환경변수로 주입. 코드·이미지·repo 어디에도 없음</a:t>
             </a:r>
             <a:endParaRPr lang="en-US" sz="1350" dirty="0"/>
           </a:p>
@@ -16885,6 +16327,10 @@
           </a:solidFill>
           <a:ln/>
         </p:spPr>
+        <p:txBody>
+          <a:bodyPr/>
+          <a:p/>
+        </p:txBody>
       </p:sp>
       <p:sp>
         <p:nvSpPr>
@@ -16972,7 +16418,7 @@
                 <a:ea typeface="Calibri" pitchFamily="34" charset="-122"/>
                 <a:cs typeface="Calibri" pitchFamily="34" charset="-120"/>
               </a:rPr>
-              <a:t>/healthz로 자가치유와 협력 + 배포 버전 확인 창구</a:t>
+              <a:t>/healthz 하나로 자가치유 판단과 배포 버전 확인을 같이 함</a:t>
             </a:r>
             <a:endParaRPr lang="en-US" sz="1350" dirty="0"/>
           </a:p>
@@ -17011,7 +16457,7 @@
                 <a:ea typeface="Cambria" pitchFamily="34" charset="-122"/>
                 <a:cs typeface="Cambria" pitchFamily="34" charset="-120"/>
               </a:rPr>
-              <a:t>“이 요청 하나가 성공하면, 시스템 전체가 검증된 것”</a:t>
+              <a:t>이 요청 하나가 통과하면 ALB부터 RDS까지 전 구간이 검증된 셈입니다</a:t>
             </a:r>
             <a:endParaRPr lang="en-US" sz="1900" dirty="0"/>
           </a:p>
@@ -17082,7 +16528,7 @@
                 <a:ea typeface="Cambria" pitchFamily="34" charset="-122"/>
                 <a:cs typeface="Cambria" pitchFamily="34" charset="-120"/>
               </a:rPr>
-              <a:t>06. 시연 과정 (1/3) — GitOps 자동 배포</a:t>
+              <a:t>06. 시연 과정 (1/3) - GitOps 자동 배포</a:t>
             </a:r>
             <a:endParaRPr lang="en-US" sz="2800" dirty="0"/>
           </a:p>
@@ -17121,7 +16567,7 @@
                 <a:ea typeface="Calibri" pitchFamily="34" charset="-122"/>
                 <a:cs typeface="Calibri" pitchFamily="34" charset="-120"/>
               </a:rPr>
-              <a:t>PAGE 07</a:t>
+              <a:t>PAGE 09</a:t>
             </a:r>
             <a:endParaRPr lang="en-US" sz="1000" dirty="0"/>
           </a:p>
@@ -17146,6 +16592,10 @@
           </a:solidFill>
           <a:ln/>
         </p:spPr>
+        <p:txBody>
+          <a:bodyPr/>
+          <a:p/>
+        </p:txBody>
       </p:sp>
       <p:sp>
         <p:nvSpPr>
@@ -17236,6 +16686,10 @@
             <a:prstDash val="solid"/>
           </a:ln>
         </p:spPr>
+        <p:txBody>
+          <a:bodyPr/>
+          <a:p/>
+        </p:txBody>
       </p:sp>
       <p:sp>
         <p:nvSpPr>
@@ -17246,7 +16700,7 @@
         <p:spPr>
           <a:xfrm>
             <a:off x="1280160" y="1371600"/>
-            <a:ext cx="6035040" cy="731520"/>
+            <a:ext cx="4114800" cy="731520"/>
           </a:xfrm>
           <a:prstGeom prst="roundRect">
             <a:avLst>
@@ -17258,6 +16712,10 @@
           </a:solidFill>
           <a:ln/>
         </p:spPr>
+        <p:txBody>
+          <a:bodyPr/>
+          <a:p/>
+        </p:txBody>
       </p:sp>
       <p:sp>
         <p:nvSpPr>
@@ -17268,7 +16726,7 @@
         <p:spPr>
           <a:xfrm>
             <a:off x="1554480" y="1371600"/>
-            <a:ext cx="5577840" cy="731520"/>
+            <a:ext cx="3657600" cy="731520"/>
           </a:xfrm>
           <a:prstGeom prst="rect">
             <a:avLst/>
@@ -17331,6 +16789,10 @@
           </a:solidFill>
           <a:ln/>
         </p:spPr>
+        <p:txBody>
+          <a:bodyPr/>
+          <a:p/>
+        </p:txBody>
       </p:sp>
       <p:sp>
         <p:nvSpPr>
@@ -17421,6 +16883,10 @@
             <a:prstDash val="solid"/>
           </a:ln>
         </p:spPr>
+        <p:txBody>
+          <a:bodyPr/>
+          <a:p/>
+        </p:txBody>
       </p:sp>
       <p:sp>
         <p:nvSpPr>
@@ -17431,7 +16897,7 @@
         <p:spPr>
           <a:xfrm>
             <a:off x="1280160" y="2340864"/>
-            <a:ext cx="6035040" cy="731520"/>
+            <a:ext cx="4114800" cy="731520"/>
           </a:xfrm>
           <a:prstGeom prst="roundRect">
             <a:avLst>
@@ -17443,6 +16909,10 @@
           </a:solidFill>
           <a:ln/>
         </p:spPr>
+        <p:txBody>
+          <a:bodyPr/>
+          <a:p/>
+        </p:txBody>
       </p:sp>
       <p:sp>
         <p:nvSpPr>
@@ -17453,7 +16923,7 @@
         <p:spPr>
           <a:xfrm>
             <a:off x="1554480" y="2340864"/>
-            <a:ext cx="5577840" cy="731520"/>
+            <a:ext cx="3657600" cy="731520"/>
           </a:xfrm>
           <a:prstGeom prst="rect">
             <a:avLst/>
@@ -17516,6 +16986,10 @@
           </a:solidFill>
           <a:ln/>
         </p:spPr>
+        <p:txBody>
+          <a:bodyPr/>
+          <a:p/>
+        </p:txBody>
       </p:sp>
       <p:sp>
         <p:nvSpPr>
@@ -17606,6 +17080,10 @@
             <a:prstDash val="solid"/>
           </a:ln>
         </p:spPr>
+        <p:txBody>
+          <a:bodyPr/>
+          <a:p/>
+        </p:txBody>
       </p:sp>
       <p:sp>
         <p:nvSpPr>
@@ -17616,7 +17094,7 @@
         <p:spPr>
           <a:xfrm>
             <a:off x="1280160" y="3310128"/>
-            <a:ext cx="6035040" cy="731520"/>
+            <a:ext cx="4114800" cy="731520"/>
           </a:xfrm>
           <a:prstGeom prst="roundRect">
             <a:avLst>
@@ -17628,6 +17106,10 @@
           </a:solidFill>
           <a:ln/>
         </p:spPr>
+        <p:txBody>
+          <a:bodyPr/>
+          <a:p/>
+        </p:txBody>
       </p:sp>
       <p:sp>
         <p:nvSpPr>
@@ -17638,7 +17120,7 @@
         <p:spPr>
           <a:xfrm>
             <a:off x="1554480" y="3310128"/>
-            <a:ext cx="5577840" cy="731520"/>
+            <a:ext cx="3657600" cy="731520"/>
           </a:xfrm>
           <a:prstGeom prst="rect">
             <a:avLst/>
@@ -17701,6 +17183,10 @@
           </a:solidFill>
           <a:ln/>
         </p:spPr>
+        <p:txBody>
+          <a:bodyPr/>
+          <a:p/>
+        </p:txBody>
       </p:sp>
       <p:sp>
         <p:nvSpPr>
@@ -17791,6 +17277,10 @@
             <a:prstDash val="solid"/>
           </a:ln>
         </p:spPr>
+        <p:txBody>
+          <a:bodyPr/>
+          <a:p/>
+        </p:txBody>
       </p:sp>
       <p:sp>
         <p:nvSpPr>
@@ -17801,7 +17291,7 @@
         <p:spPr>
           <a:xfrm>
             <a:off x="1280160" y="4279392"/>
-            <a:ext cx="6035040" cy="731520"/>
+            <a:ext cx="4114800" cy="731520"/>
           </a:xfrm>
           <a:prstGeom prst="roundRect">
             <a:avLst>
@@ -17813,6 +17303,10 @@
           </a:solidFill>
           <a:ln/>
         </p:spPr>
+        <p:txBody>
+          <a:bodyPr/>
+          <a:p/>
+        </p:txBody>
       </p:sp>
       <p:sp>
         <p:nvSpPr>
@@ -17823,7 +17317,7 @@
         <p:spPr>
           <a:xfrm>
             <a:off x="1554480" y="4279392"/>
-            <a:ext cx="5577840" cy="731520"/>
+            <a:ext cx="3657600" cy="731520"/>
           </a:xfrm>
           <a:prstGeom prst="rect">
             <a:avLst/>
@@ -17886,6 +17380,10 @@
           </a:solidFill>
           <a:ln/>
         </p:spPr>
+        <p:txBody>
+          <a:bodyPr/>
+          <a:p/>
+        </p:txBody>
       </p:sp>
       <p:sp>
         <p:nvSpPr>
@@ -17963,7 +17461,7 @@
         <p:spPr>
           <a:xfrm>
             <a:off x="1280160" y="5248656"/>
-            <a:ext cx="6035040" cy="731520"/>
+            <a:ext cx="4114800" cy="731520"/>
           </a:xfrm>
           <a:prstGeom prst="roundRect">
             <a:avLst>
@@ -17975,6 +17473,10 @@
           </a:solidFill>
           <a:ln/>
         </p:spPr>
+        <p:txBody>
+          <a:bodyPr/>
+          <a:p/>
+        </p:txBody>
       </p:sp>
       <p:sp>
         <p:nvSpPr>
@@ -17985,7 +17487,7 @@
         <p:spPr>
           <a:xfrm>
             <a:off x="1554480" y="5248656"/>
-            <a:ext cx="5577840" cy="731520"/>
+            <a:ext cx="3657600" cy="731520"/>
           </a:xfrm>
           <a:prstGeom prst="rect">
             <a:avLst/>
@@ -18037,8 +17539,8 @@
         </p:nvSpPr>
         <p:spPr>
           <a:xfrm>
-            <a:off x="7680960" y="1371600"/>
-            <a:ext cx="3977640" cy="1737360"/>
+            <a:off x="5760720" y="5205001"/>
+            <a:ext cx="5882640" cy="1000000"/>
           </a:xfrm>
           <a:prstGeom prst="rect">
             <a:avLst/>
@@ -18066,7 +17568,7 @@
                 <a:ea typeface="Calibri" pitchFamily="34" charset="-122"/>
                 <a:cs typeface="Calibri" pitchFamily="34" charset="-120"/>
               </a:rPr>
-              <a:t>앱 repo(공개) · 매니페스트 repo(비공개) 분리 — Git이 단일 진실 공급원</a:t>
+              <a:t>앱 repo(공개)와 매니페스트 repo(비공개)를 분리. Git이 단일 진실 공급원</a:t>
             </a:r>
             <a:endParaRPr lang="en-US" sz="1250" dirty="0"/>
           </a:p>
@@ -18084,7 +17586,7 @@
                 <a:ea typeface="Calibri" pitchFamily="34" charset="-122"/>
                 <a:cs typeface="Calibri" pitchFamily="34" charset="-120"/>
               </a:rPr>
-              <a:t>drift는 ArgoCD가 감지해 Git 상태로 복원 · 롤백 = git revert 한 번</a:t>
+              <a:t>drift는 ArgoCD가 감지해 Git 상태로 되돌리고, 롤백은 git revert 한 번</a:t>
             </a:r>
             <a:endParaRPr lang="en-US" sz="1250" dirty="0"/>
           </a:p>
@@ -18098,8 +17600,8 @@
         </p:nvSpPr>
         <p:spPr>
           <a:xfrm>
-            <a:off x="7680960" y="3246120"/>
-            <a:ext cx="3977640" cy="256032"/>
+            <a:off x="5760720" y="1371600"/>
+            <a:ext cx="5882640" cy="256032"/>
           </a:xfrm>
           <a:prstGeom prst="rect">
             <a:avLst/>
@@ -18123,7 +17625,7 @@
                 <a:ea typeface="Calibri" pitchFamily="34" charset="-122"/>
                 <a:cs typeface="Calibri" pitchFamily="34" charset="-120"/>
               </a:rPr>
-              <a:t>ArgoCD — Synced / Healthy, hpa 포함 리소스 트리</a:t>
+              <a:t>ArgoCD 화면: Synced / Healthy, hpa까지 포함된 리소스 트리</a:t>
             </a:r>
             <a:endParaRPr lang="en-US" sz="1150" dirty="0"/>
           </a:p>
@@ -18145,8 +17647,8 @@
         </p:blipFill>
         <p:spPr>
           <a:xfrm>
-            <a:off x="7680960" y="3520440"/>
-            <a:ext cx="3977640" cy="2322576"/>
+            <a:off x="5760720" y="1645920"/>
+            <a:ext cx="5882640" cy="3439081"/>
           </a:xfrm>
           <a:prstGeom prst="rect">
             <a:avLst/>

--- a/docs/presentation.pptx
+++ b/docs/presentation.pptx
@@ -960,7 +960,7 @@
           <a:p>
             <a:r>
               <a:rPr lang="en-US" dirty="0"/>
-              <a:t>실수를 절차 개선으로 전환한 태도를 보여주는 장.</a:t>
+              <a:t>각자 옳은 설정(이미지 USER × runAsNonRoot)의 조합이 검증 불가였던 사례. 재빌드 없이 해결하고 근본 대책(Dockerfile 숫자 UID)은 백로그로 둔 판단이 포인트.</a:t>
             </a:r>
             <a:endParaRPr lang="en-US" dirty="0"/>
           </a:p>
@@ -2764,7 +2764,7 @@
                 <a:ea typeface="Calibri" pitchFamily="34" charset="-122"/>
                 <a:cs typeface="Calibri" pitchFamily="34" charset="-120"/>
               </a:rPr>
-              <a:t>2026.08 (재검증 5회)</a:t>
+              <a:t>수명주기 재현 5회 (7~8월)</a:t>
             </a:r>
             <a:endParaRPr lang="en-US" sz="1300" dirty="0"/>
           </a:p>
@@ -4615,7 +4615,7 @@
                 <a:ea typeface="Calibri" pitchFamily="34" charset="-122"/>
                 <a:cs typeface="Calibri" pitchFamily="34" charset="-120"/>
               </a:rPr>
-              <a:t>트러블슈팅은 총 7건을 S/A/B 등급으로 기록. 여기서는 상위 3건(S·S·A)만 다루고 나머지는 repo에</a:t>
+              <a:t>트러블슈팅은 총 7건을 S/A/B 등급으로 기록. 여기서는 상위 3건(S·S·A, repo의 1~3번)만 다루고 나머지는 repo에</a:t>
             </a:r>
             <a:endParaRPr lang="en-US" sz="1200" dirty="0"/>
           </a:p>
@@ -8212,7 +8212,7 @@
                 <a:ea typeface="Calibri" pitchFamily="34" charset="-122"/>
                 <a:cs typeface="Calibri" pitchFamily="34" charset="-120"/>
               </a:rPr>
-              <a:t>과하지 않게: 서비스 메시, 멀티클러스터, Karpenter는 규모에 안 맞아 뺐습니다 (근거는 repo의 ADR)</a:t>
+              <a:t>과하지 않게: 서비스 메시, 멀티클러스터, Karpenter는 규모에 안 맞아 뺐습니다 (근거는 repo의 tech-stack.md)</a:t>
             </a:r>
             <a:endParaRPr lang="en-US" sz="1150" dirty="0"/>
           </a:p>
@@ -9158,6 +9158,27 @@
         <p:txBody>
           <a:bodyPr wrap="square" lIns="0" tIns="0" rIns="0" bIns="0" rtlCol="0" anchor="t"/>
           <a:lstStyle/>
+          <a:p>
+            <a:pPr marL="342900" indent="-342900">
+              <a:spcAft>
+                <a:spcPts val="1200"/>
+              </a:spcAft>
+              <a:buSzPct val="100000"/>
+              <a:buChar char="•"/>
+            </a:pPr>
+            <a:r>
+              <a:rPr lang="en-US" sz="1400" dirty="0">
+                <a:solidFill>
+                  <a:srgbClr val="3A3F52"/>
+                </a:solidFill>
+                <a:latin typeface="Calibri" pitchFamily="34" charset="0"/>
+                <a:ea typeface="Calibri" pitchFamily="34" charset="-122"/>
+                <a:cs typeface="Calibri" pitchFamily="34" charset="-120"/>
+              </a:rPr>
+              <a:t>EKS 버전 상향 (1.31 → 1.34+): 확장 지원 요금 회피</a:t>
+            </a:r>
+            <a:endParaRPr lang="en-US" sz="1400" dirty="0"/>
+          </a:p>
           <a:p>
             <a:pPr marL="342900" indent="-342900">
               <a:spcAft>
@@ -12157,7 +12178,7 @@
                           <a:ea typeface="Calibri" pitchFamily="34" charset="-122"/>
                           <a:cs typeface="Calibri" pitchFamily="34" charset="-120"/>
                         </a:rPr>
-                        <a:t>Terraform · EKS · RDS(PostgreSQL 17) · GitHub Actions(OIDC) · ArgoCD · HPA · Prometheus/Grafana</a:t>
+                        <a:t>Terraform · EKS · RDS(PostgreSQL 17) · GitHub Actions(OIDC) · ArgoCD · Kustomize · HPA · Prometheus/Grafana · CloudWatch</a:t>
                       </a:r>
                       <a:endParaRPr lang="en-US" sz="1450" dirty="0">
                         <a:latin typeface="Calibri" charset="0"/>
@@ -13395,23 +13416,6 @@
                 <a:ea typeface="Calibri" pitchFamily="34" charset="-122"/>
                 <a:cs typeface="Calibri" pitchFamily="34" charset="-120"/>
               </a:rPr>
-              <a:t>무중단</a:t>
-            </a:r>
-            <a:endParaRPr lang="en-US" sz="1050" dirty="0"/>
-          </a:p>
-          <a:p>
-            <a:pPr algn="ctr" indent="0" marL="0">
-              <a:buNone/>
-            </a:pPr>
-            <a:r>
-              <a:rPr lang="en-US" sz="1050" b="1" dirty="0">
-                <a:solidFill>
-                  <a:srgbClr val="1E2761"/>
-                </a:solidFill>
-                <a:latin typeface="Calibri" pitchFamily="34" charset="0"/>
-                <a:ea typeface="Calibri" pitchFamily="34" charset="-122"/>
-                <a:cs typeface="Calibri" pitchFamily="34" charset="-120"/>
-              </a:rPr>
               <a:t>롤링 배포</a:t>
             </a:r>
             <a:endParaRPr lang="en-US" sz="1050" dirty="0"/>
@@ -13435,7 +13439,7 @@
         <p:spPr>
           <a:xfrm>
             <a:off x="548640" y="2011680"/>
-            <a:ext cx="7040880" cy="4005072"/>
+            <a:ext cx="7040880" cy="4017640"/>
           </a:xfrm>
           <a:prstGeom prst="rect">
             <a:avLst/>
@@ -14229,7 +14233,28 @@
                 <a:ea typeface="Calibri" pitchFamily="34" charset="-122"/>
                 <a:cs typeface="Calibri" pitchFamily="34" charset="-120"/>
               </a:rPr>
-              <a:t>3) AWS 자원은 전부 Terraform으로. 서브넷 태그까지 코드에 적고, destroy 후 잔여물 13개 항목을 직접 확인</a:t>
+              <a:t>3) 기반 자원은 전부 Terraform으로. 서브넷 태그까지 코드에 적고,</a:t>
+            </a:r>
+            <a:br>
+              <a:rPr lang="en-US" sz="1500" b="1" dirty="0">
+                <a:solidFill>
+                  <a:srgbClr val="3A3F52"/>
+                </a:solidFill>
+                <a:latin typeface="Calibri" pitchFamily="34" charset="0"/>
+                <a:ea typeface="Calibri" pitchFamily="34" charset="-122"/>
+                <a:cs typeface="Calibri" pitchFamily="34" charset="-120"/>
+              </a:rPr>
+            </a:br>
+            <a:r>
+              <a:rPr lang="en-US" sz="1500" b="1" dirty="0">
+                <a:solidFill>
+                  <a:srgbClr val="3A3F52"/>
+                </a:solidFill>
+                <a:latin typeface="Calibri" pitchFamily="34" charset="0"/>
+                <a:ea typeface="Calibri" pitchFamily="34" charset="-122"/>
+                <a:cs typeface="Calibri" pitchFamily="34" charset="-120"/>
+              </a:rPr>
+              <a:t>state 밖 자원(ALB·EBS)은 종료 절차로 회수해 destroy 후 잔여물 13개 항목을 직접 확인</a:t>
             </a:r>
             <a:endParaRPr lang="en-US" sz="1500" dirty="0"/>
           </a:p>
@@ -14990,7 +15015,7 @@
                 <a:ea typeface="Calibri" pitchFamily="34" charset="-122"/>
                 <a:cs typeface="Calibri" pitchFamily="34" charset="-120"/>
               </a:rPr>
-              <a:t>GitHub Actions · ArgoCD · Kustomize</a:t>
+              <a:t>GitHub Actions · ArgoCD · Kustomize · Helm</a:t>
             </a:r>
             <a:endParaRPr lang="en-US" sz="1250" dirty="0"/>
           </a:p>
@@ -17355,7 +17380,7 @@
                 <a:ea typeface="Calibri" pitchFamily="34" charset="-122"/>
                 <a:cs typeface="Calibri" pitchFamily="34" charset="-120"/>
               </a:rPr>
-              <a:t>변경 감지 → 무중단 롤링 배포</a:t>
+              <a:t>변경 감지 → 롤링 배포</a:t>
             </a:r>
             <a:endParaRPr lang="en-US" sz="1450" dirty="0"/>
           </a:p>

--- a/docs/presentation.pptx
+++ b/docs/presentation.pptx
@@ -1312,7 +1312,7 @@
           <a:p>
             <a:r>
               <a:rPr lang="en-US" dirty="0"/>
-              <a:t>표지와 수미상관. 질문 대응은 interview-prep.md 기반.</a:t>
+              <a:t>표지와 수미상관. 질문 대응은 면접 준비 노트 기반.</a:t>
             </a:r>
             <a:endParaRPr lang="en-US" dirty="0"/>
           </a:p>
@@ -8212,7 +8212,7 @@
                 <a:ea typeface="Calibri" pitchFamily="34" charset="-122"/>
                 <a:cs typeface="Calibri" pitchFamily="34" charset="-120"/>
               </a:rPr>
-              <a:t>과하지 않게: 서비스 메시, 멀티클러스터, Karpenter는 규모에 안 맞아 뺐습니다 (근거는 repo의 tech-stack.md)</a:t>
+              <a:t>과하지 않게: 서비스 메시, 멀티클러스터, Karpenter는 규모에 안 맞아 뺐습니다 (근거는 README 3장)</a:t>
             </a:r>
             <a:endParaRPr lang="en-US" sz="1150" dirty="0"/>
           </a:p>
@@ -9492,7 +9492,7 @@
                 <a:ea typeface="Calibri" pitchFamily="34" charset="-122"/>
                 <a:cs typeface="Calibri" pitchFamily="34" charset="-120"/>
               </a:rPr>
-              <a:t>트러블슈팅 7건 (문제 → 진단 → 해결 → 배운 점)   ·   ADR 3건   ·   작업 로그·재기동/종료 루틴</a:t>
+              <a:t>트러블슈팅 7건 (문제 → 진단 → 해결 → 배운 점)   ·   ADR 3건   ·   아키텍처 구성도</a:t>
             </a:r>
             <a:endParaRPr lang="en-US" sz="1250" dirty="0"/>
           </a:p>
